--- a/NLP_4 Classifier.pptx
+++ b/NLP_4 Classifier.pptx
@@ -14,19 +14,19 @@
     <p:sldId id="387" r:id="rId8"/>
     <p:sldId id="292" r:id="rId9"/>
     <p:sldId id="378" r:id="rId10"/>
-    <p:sldId id="394" r:id="rId11"/>
-    <p:sldId id="401" r:id="rId12"/>
-    <p:sldId id="398" r:id="rId13"/>
-    <p:sldId id="410" r:id="rId14"/>
-    <p:sldId id="389" r:id="rId15"/>
-    <p:sldId id="411" r:id="rId16"/>
-    <p:sldId id="283" r:id="rId17"/>
-    <p:sldId id="399" r:id="rId18"/>
-    <p:sldId id="307" r:id="rId19"/>
-    <p:sldId id="285" r:id="rId20"/>
-    <p:sldId id="412" r:id="rId21"/>
-    <p:sldId id="404" r:id="rId22"/>
-    <p:sldId id="403" r:id="rId23"/>
+    <p:sldId id="401" r:id="rId11"/>
+    <p:sldId id="398" r:id="rId12"/>
+    <p:sldId id="410" r:id="rId13"/>
+    <p:sldId id="389" r:id="rId14"/>
+    <p:sldId id="411" r:id="rId15"/>
+    <p:sldId id="283" r:id="rId16"/>
+    <p:sldId id="399" r:id="rId17"/>
+    <p:sldId id="307" r:id="rId18"/>
+    <p:sldId id="285" r:id="rId19"/>
+    <p:sldId id="412" r:id="rId20"/>
+    <p:sldId id="404" r:id="rId21"/>
+    <p:sldId id="403" r:id="rId22"/>
+    <p:sldId id="394" r:id="rId23"/>
   </p:sldIdLst>
   <p:sldSz cx="12192000" cy="6858000"/>
   <p:notesSz cx="6858000" cy="9144000"/>
@@ -2643,148 +2643,6 @@
         <a:lstStyle/>
         <a:p>
           <a:r>
-            <a:rPr kumimoji="1" lang="ja-JP"/>
-            <a:t>学習</a:t>
-          </a:r>
-          <a:endParaRPr lang="ja-JP"/>
-        </a:p>
-      </dgm:t>
-    </dgm:pt>
-    <dgm:pt modelId="{9A6B73F4-F738-4431-BF13-97906DDD5B7C}" type="parTrans" cxnId="{DE57CA70-FF38-42CF-A60A-B84DEA91AE30}">
-      <dgm:prSet/>
-      <dgm:spPr/>
-      <dgm:t>
-        <a:bodyPr/>
-        <a:lstStyle/>
-        <a:p>
-          <a:endParaRPr kumimoji="1" lang="ja-JP" altLang="en-US"/>
-        </a:p>
-      </dgm:t>
-    </dgm:pt>
-    <dgm:pt modelId="{969B20AC-3320-4D67-A8BC-B17D1364FD54}" type="sibTrans" cxnId="{DE57CA70-FF38-42CF-A60A-B84DEA91AE30}">
-      <dgm:prSet/>
-      <dgm:spPr/>
-      <dgm:t>
-        <a:bodyPr/>
-        <a:lstStyle/>
-        <a:p>
-          <a:endParaRPr kumimoji="1" lang="ja-JP" altLang="en-US"/>
-        </a:p>
-      </dgm:t>
-    </dgm:pt>
-    <dgm:pt modelId="{794846D3-1B3B-4C05-826B-A34404009A7A}">
-      <dgm:prSet/>
-      <dgm:spPr/>
-      <dgm:t>
-        <a:bodyPr/>
-        <a:lstStyle/>
-        <a:p>
-          <a:r>
-            <a:rPr kumimoji="1" lang="ja-JP" dirty="0"/>
-            <a:t>予測</a:t>
-          </a:r>
-          <a:r>
-            <a:rPr kumimoji="1" lang="ja-JP" altLang="en-US" dirty="0"/>
-            <a:t>・識別</a:t>
-          </a:r>
-          <a:endParaRPr lang="ja-JP" dirty="0"/>
-        </a:p>
-      </dgm:t>
-    </dgm:pt>
-    <dgm:pt modelId="{D77BCC7F-7DB9-4C6A-9AAE-106FC5BC3E0D}" type="parTrans" cxnId="{03766C05-7296-4B91-9047-30962DC75518}">
-      <dgm:prSet/>
-      <dgm:spPr/>
-      <dgm:t>
-        <a:bodyPr/>
-        <a:lstStyle/>
-        <a:p>
-          <a:endParaRPr kumimoji="1" lang="ja-JP" altLang="en-US"/>
-        </a:p>
-      </dgm:t>
-    </dgm:pt>
-    <dgm:pt modelId="{8E1E47AF-9E8C-411E-B641-EDFB868FD7F0}" type="sibTrans" cxnId="{03766C05-7296-4B91-9047-30962DC75518}">
-      <dgm:prSet/>
-      <dgm:spPr/>
-      <dgm:t>
-        <a:bodyPr/>
-        <a:lstStyle/>
-        <a:p>
-          <a:endParaRPr kumimoji="1" lang="ja-JP" altLang="en-US"/>
-        </a:p>
-      </dgm:t>
-    </dgm:pt>
-    <dgm:pt modelId="{A7140E7A-F7C5-445D-A63D-95E7EA4F2B2C}" type="pres">
-      <dgm:prSet presAssocID="{D22A3129-BE50-4C02-ACA3-241ABDFA0B0C}" presName="Name0" presStyleCnt="0">
-        <dgm:presLayoutVars>
-          <dgm:dir/>
-          <dgm:resizeHandles val="exact"/>
-        </dgm:presLayoutVars>
-      </dgm:prSet>
-      <dgm:spPr/>
-    </dgm:pt>
-    <dgm:pt modelId="{8C543277-1F2B-476F-A36E-322E765317B8}" type="pres">
-      <dgm:prSet presAssocID="{EBBDCC13-3497-427A-9B65-D73C94A8691B}" presName="parTxOnly" presStyleLbl="node1" presStyleIdx="0" presStyleCnt="2" custLinFactNeighborX="1514" custLinFactNeighborY="-3691">
-        <dgm:presLayoutVars>
-          <dgm:bulletEnabled val="1"/>
-        </dgm:presLayoutVars>
-      </dgm:prSet>
-      <dgm:spPr/>
-    </dgm:pt>
-    <dgm:pt modelId="{3C6A27BD-E5D1-4E5D-88A9-E58512A017B8}" type="pres">
-      <dgm:prSet presAssocID="{969B20AC-3320-4D67-A8BC-B17D1364FD54}" presName="parSpace" presStyleCnt="0"/>
-      <dgm:spPr/>
-    </dgm:pt>
-    <dgm:pt modelId="{D45D537F-AA06-49B5-B1E2-D1ECF653590D}" type="pres">
-      <dgm:prSet presAssocID="{794846D3-1B3B-4C05-826B-A34404009A7A}" presName="parTxOnly" presStyleLbl="node1" presStyleIdx="1" presStyleCnt="2" custLinFactNeighborX="3247" custLinFactNeighborY="55896">
-        <dgm:presLayoutVars>
-          <dgm:bulletEnabled val="1"/>
-        </dgm:presLayoutVars>
-      </dgm:prSet>
-      <dgm:spPr/>
-    </dgm:pt>
-  </dgm:ptLst>
-  <dgm:cxnLst>
-    <dgm:cxn modelId="{03766C05-7296-4B91-9047-30962DC75518}" srcId="{D22A3129-BE50-4C02-ACA3-241ABDFA0B0C}" destId="{794846D3-1B3B-4C05-826B-A34404009A7A}" srcOrd="1" destOrd="0" parTransId="{D77BCC7F-7DB9-4C6A-9AAE-106FC5BC3E0D}" sibTransId="{8E1E47AF-9E8C-411E-B641-EDFB868FD7F0}"/>
-    <dgm:cxn modelId="{8B15AE2C-F0CD-40B0-A4BD-7901302C14BF}" type="presOf" srcId="{794846D3-1B3B-4C05-826B-A34404009A7A}" destId="{D45D537F-AA06-49B5-B1E2-D1ECF653590D}" srcOrd="0" destOrd="0" presId="urn:microsoft.com/office/officeart/2005/8/layout/hChevron3"/>
-    <dgm:cxn modelId="{DE57CA70-FF38-42CF-A60A-B84DEA91AE30}" srcId="{D22A3129-BE50-4C02-ACA3-241ABDFA0B0C}" destId="{EBBDCC13-3497-427A-9B65-D73C94A8691B}" srcOrd="0" destOrd="0" parTransId="{9A6B73F4-F738-4431-BF13-97906DDD5B7C}" sibTransId="{969B20AC-3320-4D67-A8BC-B17D1364FD54}"/>
-    <dgm:cxn modelId="{581FBC87-C241-4034-A4D2-500C5D344F99}" type="presOf" srcId="{D22A3129-BE50-4C02-ACA3-241ABDFA0B0C}" destId="{A7140E7A-F7C5-445D-A63D-95E7EA4F2B2C}" srcOrd="0" destOrd="0" presId="urn:microsoft.com/office/officeart/2005/8/layout/hChevron3"/>
-    <dgm:cxn modelId="{1692229D-34F1-4269-8B6F-1E0FF7EC4BF6}" type="presOf" srcId="{EBBDCC13-3497-427A-9B65-D73C94A8691B}" destId="{8C543277-1F2B-476F-A36E-322E765317B8}" srcOrd="0" destOrd="0" presId="urn:microsoft.com/office/officeart/2005/8/layout/hChevron3"/>
-    <dgm:cxn modelId="{DCE8C953-9804-4672-A0C3-129A9CE9C14E}" type="presParOf" srcId="{A7140E7A-F7C5-445D-A63D-95E7EA4F2B2C}" destId="{8C543277-1F2B-476F-A36E-322E765317B8}" srcOrd="0" destOrd="0" presId="urn:microsoft.com/office/officeart/2005/8/layout/hChevron3"/>
-    <dgm:cxn modelId="{200ED11C-1429-47B0-9395-08D3917861AD}" type="presParOf" srcId="{A7140E7A-F7C5-445D-A63D-95E7EA4F2B2C}" destId="{3C6A27BD-E5D1-4E5D-88A9-E58512A017B8}" srcOrd="1" destOrd="0" presId="urn:microsoft.com/office/officeart/2005/8/layout/hChevron3"/>
-    <dgm:cxn modelId="{B563C6A0-9E4B-4FC9-AFD1-1395D1769954}" type="presParOf" srcId="{A7140E7A-F7C5-445D-A63D-95E7EA4F2B2C}" destId="{D45D537F-AA06-49B5-B1E2-D1ECF653590D}" srcOrd="2" destOrd="0" presId="urn:microsoft.com/office/officeart/2005/8/layout/hChevron3"/>
-  </dgm:cxnLst>
-  <dgm:bg/>
-  <dgm:whole/>
-  <dgm:extLst>
-    <a:ext uri="http://schemas.microsoft.com/office/drawing/2008/diagram">
-      <dsp:dataModelExt xmlns:dsp="http://schemas.microsoft.com/office/drawing/2008/diagram" relId="rId7" minVer="http://schemas.openxmlformats.org/drawingml/2006/diagram"/>
-    </a:ext>
-  </dgm:extLst>
-</dgm:dataModel>
-</file>
-
-<file path=ppt/diagrams/data3.xml><?xml version="1.0" encoding="utf-8"?>
-<dgm:dataModel xmlns:dgm="http://schemas.openxmlformats.org/drawingml/2006/diagram" xmlns:a="http://schemas.openxmlformats.org/drawingml/2006/main">
-  <dgm:ptLst>
-    <dgm:pt modelId="{D22A3129-BE50-4C02-ACA3-241ABDFA0B0C}" type="doc">
-      <dgm:prSet loTypeId="urn:microsoft.com/office/officeart/2005/8/layout/hChevron3" loCatId="process" qsTypeId="urn:microsoft.com/office/officeart/2005/8/quickstyle/simple1" qsCatId="simple" csTypeId="urn:microsoft.com/office/officeart/2005/8/colors/colorful5" csCatId="colorful" phldr="1"/>
-      <dgm:spPr/>
-      <dgm:t>
-        <a:bodyPr/>
-        <a:lstStyle/>
-        <a:p>
-          <a:endParaRPr kumimoji="1" lang="ja-JP" altLang="en-US"/>
-        </a:p>
-      </dgm:t>
-    </dgm:pt>
-    <dgm:pt modelId="{EBBDCC13-3497-427A-9B65-D73C94A8691B}">
-      <dgm:prSet/>
-      <dgm:spPr/>
-      <dgm:t>
-        <a:bodyPr/>
-        <a:lstStyle/>
-        <a:p>
-          <a:r>
             <a:rPr kumimoji="1" lang="ja-JP" dirty="0"/>
             <a:t>学習</a:t>
           </a:r>
@@ -2953,6 +2811,148 @@
   <dgm:extLst>
     <a:ext uri="http://schemas.microsoft.com/office/drawing/2008/diagram">
       <dsp:dataModelExt xmlns:dsp="http://schemas.microsoft.com/office/drawing/2008/diagram" relId="rId6" minVer="http://schemas.openxmlformats.org/drawingml/2006/diagram"/>
+    </a:ext>
+  </dgm:extLst>
+</dgm:dataModel>
+</file>
+
+<file path=ppt/diagrams/data3.xml><?xml version="1.0" encoding="utf-8"?>
+<dgm:dataModel xmlns:dgm="http://schemas.openxmlformats.org/drawingml/2006/diagram" xmlns:a="http://schemas.openxmlformats.org/drawingml/2006/main">
+  <dgm:ptLst>
+    <dgm:pt modelId="{D22A3129-BE50-4C02-ACA3-241ABDFA0B0C}" type="doc">
+      <dgm:prSet loTypeId="urn:microsoft.com/office/officeart/2005/8/layout/hChevron3" loCatId="process" qsTypeId="urn:microsoft.com/office/officeart/2005/8/quickstyle/simple1" qsCatId="simple" csTypeId="urn:microsoft.com/office/officeart/2005/8/colors/colorful5" csCatId="colorful" phldr="1"/>
+      <dgm:spPr/>
+      <dgm:t>
+        <a:bodyPr/>
+        <a:lstStyle/>
+        <a:p>
+          <a:endParaRPr kumimoji="1" lang="ja-JP" altLang="en-US"/>
+        </a:p>
+      </dgm:t>
+    </dgm:pt>
+    <dgm:pt modelId="{EBBDCC13-3497-427A-9B65-D73C94A8691B}">
+      <dgm:prSet/>
+      <dgm:spPr/>
+      <dgm:t>
+        <a:bodyPr/>
+        <a:lstStyle/>
+        <a:p>
+          <a:r>
+            <a:rPr kumimoji="1" lang="ja-JP"/>
+            <a:t>学習</a:t>
+          </a:r>
+          <a:endParaRPr lang="ja-JP"/>
+        </a:p>
+      </dgm:t>
+    </dgm:pt>
+    <dgm:pt modelId="{9A6B73F4-F738-4431-BF13-97906DDD5B7C}" type="parTrans" cxnId="{DE57CA70-FF38-42CF-A60A-B84DEA91AE30}">
+      <dgm:prSet/>
+      <dgm:spPr/>
+      <dgm:t>
+        <a:bodyPr/>
+        <a:lstStyle/>
+        <a:p>
+          <a:endParaRPr kumimoji="1" lang="ja-JP" altLang="en-US"/>
+        </a:p>
+      </dgm:t>
+    </dgm:pt>
+    <dgm:pt modelId="{969B20AC-3320-4D67-A8BC-B17D1364FD54}" type="sibTrans" cxnId="{DE57CA70-FF38-42CF-A60A-B84DEA91AE30}">
+      <dgm:prSet/>
+      <dgm:spPr/>
+      <dgm:t>
+        <a:bodyPr/>
+        <a:lstStyle/>
+        <a:p>
+          <a:endParaRPr kumimoji="1" lang="ja-JP" altLang="en-US"/>
+        </a:p>
+      </dgm:t>
+    </dgm:pt>
+    <dgm:pt modelId="{794846D3-1B3B-4C05-826B-A34404009A7A}">
+      <dgm:prSet/>
+      <dgm:spPr/>
+      <dgm:t>
+        <a:bodyPr/>
+        <a:lstStyle/>
+        <a:p>
+          <a:r>
+            <a:rPr kumimoji="1" lang="ja-JP" dirty="0"/>
+            <a:t>予測</a:t>
+          </a:r>
+          <a:r>
+            <a:rPr kumimoji="1" lang="ja-JP" altLang="en-US" dirty="0"/>
+            <a:t>・識別</a:t>
+          </a:r>
+          <a:endParaRPr lang="ja-JP" dirty="0"/>
+        </a:p>
+      </dgm:t>
+    </dgm:pt>
+    <dgm:pt modelId="{D77BCC7F-7DB9-4C6A-9AAE-106FC5BC3E0D}" type="parTrans" cxnId="{03766C05-7296-4B91-9047-30962DC75518}">
+      <dgm:prSet/>
+      <dgm:spPr/>
+      <dgm:t>
+        <a:bodyPr/>
+        <a:lstStyle/>
+        <a:p>
+          <a:endParaRPr kumimoji="1" lang="ja-JP" altLang="en-US"/>
+        </a:p>
+      </dgm:t>
+    </dgm:pt>
+    <dgm:pt modelId="{8E1E47AF-9E8C-411E-B641-EDFB868FD7F0}" type="sibTrans" cxnId="{03766C05-7296-4B91-9047-30962DC75518}">
+      <dgm:prSet/>
+      <dgm:spPr/>
+      <dgm:t>
+        <a:bodyPr/>
+        <a:lstStyle/>
+        <a:p>
+          <a:endParaRPr kumimoji="1" lang="ja-JP" altLang="en-US"/>
+        </a:p>
+      </dgm:t>
+    </dgm:pt>
+    <dgm:pt modelId="{A7140E7A-F7C5-445D-A63D-95E7EA4F2B2C}" type="pres">
+      <dgm:prSet presAssocID="{D22A3129-BE50-4C02-ACA3-241ABDFA0B0C}" presName="Name0" presStyleCnt="0">
+        <dgm:presLayoutVars>
+          <dgm:dir/>
+          <dgm:resizeHandles val="exact"/>
+        </dgm:presLayoutVars>
+      </dgm:prSet>
+      <dgm:spPr/>
+    </dgm:pt>
+    <dgm:pt modelId="{8C543277-1F2B-476F-A36E-322E765317B8}" type="pres">
+      <dgm:prSet presAssocID="{EBBDCC13-3497-427A-9B65-D73C94A8691B}" presName="parTxOnly" presStyleLbl="node1" presStyleIdx="0" presStyleCnt="2" custLinFactNeighborX="1514" custLinFactNeighborY="-3691">
+        <dgm:presLayoutVars>
+          <dgm:bulletEnabled val="1"/>
+        </dgm:presLayoutVars>
+      </dgm:prSet>
+      <dgm:spPr/>
+    </dgm:pt>
+    <dgm:pt modelId="{3C6A27BD-E5D1-4E5D-88A9-E58512A017B8}" type="pres">
+      <dgm:prSet presAssocID="{969B20AC-3320-4D67-A8BC-B17D1364FD54}" presName="parSpace" presStyleCnt="0"/>
+      <dgm:spPr/>
+    </dgm:pt>
+    <dgm:pt modelId="{D45D537F-AA06-49B5-B1E2-D1ECF653590D}" type="pres">
+      <dgm:prSet presAssocID="{794846D3-1B3B-4C05-826B-A34404009A7A}" presName="parTxOnly" presStyleLbl="node1" presStyleIdx="1" presStyleCnt="2" custLinFactNeighborX="3247" custLinFactNeighborY="55896">
+        <dgm:presLayoutVars>
+          <dgm:bulletEnabled val="1"/>
+        </dgm:presLayoutVars>
+      </dgm:prSet>
+      <dgm:spPr/>
+    </dgm:pt>
+  </dgm:ptLst>
+  <dgm:cxnLst>
+    <dgm:cxn modelId="{03766C05-7296-4B91-9047-30962DC75518}" srcId="{D22A3129-BE50-4C02-ACA3-241ABDFA0B0C}" destId="{794846D3-1B3B-4C05-826B-A34404009A7A}" srcOrd="1" destOrd="0" parTransId="{D77BCC7F-7DB9-4C6A-9AAE-106FC5BC3E0D}" sibTransId="{8E1E47AF-9E8C-411E-B641-EDFB868FD7F0}"/>
+    <dgm:cxn modelId="{8B15AE2C-F0CD-40B0-A4BD-7901302C14BF}" type="presOf" srcId="{794846D3-1B3B-4C05-826B-A34404009A7A}" destId="{D45D537F-AA06-49B5-B1E2-D1ECF653590D}" srcOrd="0" destOrd="0" presId="urn:microsoft.com/office/officeart/2005/8/layout/hChevron3"/>
+    <dgm:cxn modelId="{DE57CA70-FF38-42CF-A60A-B84DEA91AE30}" srcId="{D22A3129-BE50-4C02-ACA3-241ABDFA0B0C}" destId="{EBBDCC13-3497-427A-9B65-D73C94A8691B}" srcOrd="0" destOrd="0" parTransId="{9A6B73F4-F738-4431-BF13-97906DDD5B7C}" sibTransId="{969B20AC-3320-4D67-A8BC-B17D1364FD54}"/>
+    <dgm:cxn modelId="{581FBC87-C241-4034-A4D2-500C5D344F99}" type="presOf" srcId="{D22A3129-BE50-4C02-ACA3-241ABDFA0B0C}" destId="{A7140E7A-F7C5-445D-A63D-95E7EA4F2B2C}" srcOrd="0" destOrd="0" presId="urn:microsoft.com/office/officeart/2005/8/layout/hChevron3"/>
+    <dgm:cxn modelId="{1692229D-34F1-4269-8B6F-1E0FF7EC4BF6}" type="presOf" srcId="{EBBDCC13-3497-427A-9B65-D73C94A8691B}" destId="{8C543277-1F2B-476F-A36E-322E765317B8}" srcOrd="0" destOrd="0" presId="urn:microsoft.com/office/officeart/2005/8/layout/hChevron3"/>
+    <dgm:cxn modelId="{DCE8C953-9804-4672-A0C3-129A9CE9C14E}" type="presParOf" srcId="{A7140E7A-F7C5-445D-A63D-95E7EA4F2B2C}" destId="{8C543277-1F2B-476F-A36E-322E765317B8}" srcOrd="0" destOrd="0" presId="urn:microsoft.com/office/officeart/2005/8/layout/hChevron3"/>
+    <dgm:cxn modelId="{200ED11C-1429-47B0-9395-08D3917861AD}" type="presParOf" srcId="{A7140E7A-F7C5-445D-A63D-95E7EA4F2B2C}" destId="{3C6A27BD-E5D1-4E5D-88A9-E58512A017B8}" srcOrd="1" destOrd="0" presId="urn:microsoft.com/office/officeart/2005/8/layout/hChevron3"/>
+    <dgm:cxn modelId="{B563C6A0-9E4B-4FC9-AFD1-1395D1769954}" type="presParOf" srcId="{A7140E7A-F7C5-445D-A63D-95E7EA4F2B2C}" destId="{D45D537F-AA06-49B5-B1E2-D1ECF653590D}" srcOrd="2" destOrd="0" presId="urn:microsoft.com/office/officeart/2005/8/layout/hChevron3"/>
+  </dgm:cxnLst>
+  <dgm:bg/>
+  <dgm:whole/>
+  <dgm:extLst>
+    <a:ext uri="http://schemas.microsoft.com/office/drawing/2008/diagram">
+      <dsp:dataModelExt xmlns:dsp="http://schemas.microsoft.com/office/drawing/2008/diagram" relId="rId7" minVer="http://schemas.openxmlformats.org/drawingml/2006/diagram"/>
     </a:ext>
   </dgm:extLst>
 </dgm:dataModel>
@@ -3133,180 +3133,6 @@
 </file>
 
 <file path=ppt/diagrams/drawing2.xml><?xml version="1.0" encoding="utf-8"?>
-<dsp:drawing xmlns:dgm="http://schemas.openxmlformats.org/drawingml/2006/diagram" xmlns:dsp="http://schemas.microsoft.com/office/drawing/2008/diagram" xmlns:a="http://schemas.openxmlformats.org/drawingml/2006/main">
-  <dsp:spTree>
-    <dsp:nvGrpSpPr>
-      <dsp:cNvPr id="0" name=""/>
-      <dsp:cNvGrpSpPr/>
-    </dsp:nvGrpSpPr>
-    <dsp:grpSpPr/>
-    <dsp:sp modelId="{8C543277-1F2B-476F-A36E-322E765317B8}">
-      <dsp:nvSpPr>
-        <dsp:cNvPr id="0" name=""/>
-        <dsp:cNvSpPr/>
-      </dsp:nvSpPr>
-      <dsp:spPr>
-        <a:xfrm>
-          <a:off x="22326" y="0"/>
-          <a:ext cx="5032610" cy="830997"/>
-        </a:xfrm>
-        <a:prstGeom prst="homePlate">
-          <a:avLst/>
-        </a:prstGeom>
-        <a:solidFill>
-          <a:schemeClr val="accent5">
-            <a:hueOff val="0"/>
-            <a:satOff val="0"/>
-            <a:lumOff val="0"/>
-            <a:alphaOff val="0"/>
-          </a:schemeClr>
-        </a:solidFill>
-        <a:ln w="12700" cap="flat" cmpd="sng" algn="ctr">
-          <a:solidFill>
-            <a:schemeClr val="lt1">
-              <a:hueOff val="0"/>
-              <a:satOff val="0"/>
-              <a:lumOff val="0"/>
-              <a:alphaOff val="0"/>
-            </a:schemeClr>
-          </a:solidFill>
-          <a:prstDash val="solid"/>
-          <a:miter lim="800000"/>
-        </a:ln>
-        <a:effectLst/>
-      </dsp:spPr>
-      <dsp:style>
-        <a:lnRef idx="2">
-          <a:scrgbClr r="0" g="0" b="0"/>
-        </a:lnRef>
-        <a:fillRef idx="1">
-          <a:scrgbClr r="0" g="0" b="0"/>
-        </a:fillRef>
-        <a:effectRef idx="0">
-          <a:scrgbClr r="0" g="0" b="0"/>
-        </a:effectRef>
-        <a:fontRef idx="minor">
-          <a:schemeClr val="lt1"/>
-        </a:fontRef>
-      </dsp:style>
-      <dsp:txBody>
-        <a:bodyPr spcFirstLastPara="0" vert="horz" wrap="square" lIns="176022" tIns="88011" rIns="44006" bIns="88011" numCol="1" spcCol="1270" anchor="ctr" anchorCtr="0">
-          <a:noAutofit/>
-        </a:bodyPr>
-        <a:lstStyle/>
-        <a:p>
-          <a:pPr marL="0" lvl="0" indent="0" algn="ctr" defTabSz="1466850">
-            <a:lnSpc>
-              <a:spcPct val="90000"/>
-            </a:lnSpc>
-            <a:spcBef>
-              <a:spcPct val="0"/>
-            </a:spcBef>
-            <a:spcAft>
-              <a:spcPct val="35000"/>
-            </a:spcAft>
-            <a:buNone/>
-          </a:pPr>
-          <a:r>
-            <a:rPr kumimoji="1" lang="ja-JP" sz="3300" kern="1200"/>
-            <a:t>学習</a:t>
-          </a:r>
-          <a:endParaRPr lang="ja-JP" sz="3300" kern="1200"/>
-        </a:p>
-      </dsp:txBody>
-      <dsp:txXfrm>
-        <a:off x="22326" y="0"/>
-        <a:ext cx="4824861" cy="830997"/>
-      </dsp:txXfrm>
-    </dsp:sp>
-    <dsp:sp modelId="{D45D537F-AA06-49B5-B1E2-D1ECF653590D}">
-      <dsp:nvSpPr>
-        <dsp:cNvPr id="0" name=""/>
-        <dsp:cNvSpPr/>
-      </dsp:nvSpPr>
-      <dsp:spPr>
-        <a:xfrm>
-          <a:off x="4040265" y="0"/>
-          <a:ext cx="5032610" cy="830997"/>
-        </a:xfrm>
-        <a:prstGeom prst="chevron">
-          <a:avLst/>
-        </a:prstGeom>
-        <a:solidFill>
-          <a:schemeClr val="accent5">
-            <a:hueOff val="-6758543"/>
-            <a:satOff val="-17419"/>
-            <a:lumOff val="-11765"/>
-            <a:alphaOff val="0"/>
-          </a:schemeClr>
-        </a:solidFill>
-        <a:ln w="12700" cap="flat" cmpd="sng" algn="ctr">
-          <a:solidFill>
-            <a:schemeClr val="lt1">
-              <a:hueOff val="0"/>
-              <a:satOff val="0"/>
-              <a:lumOff val="0"/>
-              <a:alphaOff val="0"/>
-            </a:schemeClr>
-          </a:solidFill>
-          <a:prstDash val="solid"/>
-          <a:miter lim="800000"/>
-        </a:ln>
-        <a:effectLst/>
-      </dsp:spPr>
-      <dsp:style>
-        <a:lnRef idx="2">
-          <a:scrgbClr r="0" g="0" b="0"/>
-        </a:lnRef>
-        <a:fillRef idx="1">
-          <a:scrgbClr r="0" g="0" b="0"/>
-        </a:fillRef>
-        <a:effectRef idx="0">
-          <a:scrgbClr r="0" g="0" b="0"/>
-        </a:effectRef>
-        <a:fontRef idx="minor">
-          <a:schemeClr val="lt1"/>
-        </a:fontRef>
-      </dsp:style>
-      <dsp:txBody>
-        <a:bodyPr spcFirstLastPara="0" vert="horz" wrap="square" lIns="132017" tIns="88011" rIns="44006" bIns="88011" numCol="1" spcCol="1270" anchor="ctr" anchorCtr="0">
-          <a:noAutofit/>
-        </a:bodyPr>
-        <a:lstStyle/>
-        <a:p>
-          <a:pPr marL="0" lvl="0" indent="0" algn="ctr" defTabSz="1466850">
-            <a:lnSpc>
-              <a:spcPct val="90000"/>
-            </a:lnSpc>
-            <a:spcBef>
-              <a:spcPct val="0"/>
-            </a:spcBef>
-            <a:spcAft>
-              <a:spcPct val="35000"/>
-            </a:spcAft>
-            <a:buNone/>
-          </a:pPr>
-          <a:r>
-            <a:rPr kumimoji="1" lang="ja-JP" sz="3300" kern="1200" dirty="0"/>
-            <a:t>予測</a:t>
-          </a:r>
-          <a:r>
-            <a:rPr kumimoji="1" lang="ja-JP" altLang="en-US" sz="3300" kern="1200" dirty="0"/>
-            <a:t>・識別</a:t>
-          </a:r>
-          <a:endParaRPr lang="ja-JP" sz="3300" kern="1200" dirty="0"/>
-        </a:p>
-      </dsp:txBody>
-      <dsp:txXfrm>
-        <a:off x="4455764" y="0"/>
-        <a:ext cx="4201613" cy="830997"/>
-      </dsp:txXfrm>
-    </dsp:sp>
-  </dsp:spTree>
-</dsp:drawing>
-</file>
-
-<file path=ppt/diagrams/drawing3.xml><?xml version="1.0" encoding="utf-8"?>
 <dsp:drawing xmlns:dgm="http://schemas.openxmlformats.org/drawingml/2006/diagram" xmlns:dsp="http://schemas.microsoft.com/office/drawing/2008/diagram" xmlns:a="http://schemas.openxmlformats.org/drawingml/2006/main">
   <dsp:spTree>
     <dsp:nvGrpSpPr>
@@ -3548,6 +3374,180 @@
       <dsp:txXfrm>
         <a:off x="6001874" y="0"/>
         <a:ext cx="2655503" cy="830997"/>
+      </dsp:txXfrm>
+    </dsp:sp>
+  </dsp:spTree>
+</dsp:drawing>
+</file>
+
+<file path=ppt/diagrams/drawing3.xml><?xml version="1.0" encoding="utf-8"?>
+<dsp:drawing xmlns:dgm="http://schemas.openxmlformats.org/drawingml/2006/diagram" xmlns:dsp="http://schemas.microsoft.com/office/drawing/2008/diagram" xmlns:a="http://schemas.openxmlformats.org/drawingml/2006/main">
+  <dsp:spTree>
+    <dsp:nvGrpSpPr>
+      <dsp:cNvPr id="0" name=""/>
+      <dsp:cNvGrpSpPr/>
+    </dsp:nvGrpSpPr>
+    <dsp:grpSpPr/>
+    <dsp:sp modelId="{8C543277-1F2B-476F-A36E-322E765317B8}">
+      <dsp:nvSpPr>
+        <dsp:cNvPr id="0" name=""/>
+        <dsp:cNvSpPr/>
+      </dsp:nvSpPr>
+      <dsp:spPr>
+        <a:xfrm>
+          <a:off x="22326" y="0"/>
+          <a:ext cx="5032610" cy="830997"/>
+        </a:xfrm>
+        <a:prstGeom prst="homePlate">
+          <a:avLst/>
+        </a:prstGeom>
+        <a:solidFill>
+          <a:schemeClr val="accent5">
+            <a:hueOff val="0"/>
+            <a:satOff val="0"/>
+            <a:lumOff val="0"/>
+            <a:alphaOff val="0"/>
+          </a:schemeClr>
+        </a:solidFill>
+        <a:ln w="12700" cap="flat" cmpd="sng" algn="ctr">
+          <a:solidFill>
+            <a:schemeClr val="lt1">
+              <a:hueOff val="0"/>
+              <a:satOff val="0"/>
+              <a:lumOff val="0"/>
+              <a:alphaOff val="0"/>
+            </a:schemeClr>
+          </a:solidFill>
+          <a:prstDash val="solid"/>
+          <a:miter lim="800000"/>
+        </a:ln>
+        <a:effectLst/>
+      </dsp:spPr>
+      <dsp:style>
+        <a:lnRef idx="2">
+          <a:scrgbClr r="0" g="0" b="0"/>
+        </a:lnRef>
+        <a:fillRef idx="1">
+          <a:scrgbClr r="0" g="0" b="0"/>
+        </a:fillRef>
+        <a:effectRef idx="0">
+          <a:scrgbClr r="0" g="0" b="0"/>
+        </a:effectRef>
+        <a:fontRef idx="minor">
+          <a:schemeClr val="lt1"/>
+        </a:fontRef>
+      </dsp:style>
+      <dsp:txBody>
+        <a:bodyPr spcFirstLastPara="0" vert="horz" wrap="square" lIns="176022" tIns="88011" rIns="44006" bIns="88011" numCol="1" spcCol="1270" anchor="ctr" anchorCtr="0">
+          <a:noAutofit/>
+        </a:bodyPr>
+        <a:lstStyle/>
+        <a:p>
+          <a:pPr marL="0" lvl="0" indent="0" algn="ctr" defTabSz="1466850">
+            <a:lnSpc>
+              <a:spcPct val="90000"/>
+            </a:lnSpc>
+            <a:spcBef>
+              <a:spcPct val="0"/>
+            </a:spcBef>
+            <a:spcAft>
+              <a:spcPct val="35000"/>
+            </a:spcAft>
+            <a:buNone/>
+          </a:pPr>
+          <a:r>
+            <a:rPr kumimoji="1" lang="ja-JP" sz="3300" kern="1200"/>
+            <a:t>学習</a:t>
+          </a:r>
+          <a:endParaRPr lang="ja-JP" sz="3300" kern="1200"/>
+        </a:p>
+      </dsp:txBody>
+      <dsp:txXfrm>
+        <a:off x="22326" y="0"/>
+        <a:ext cx="4824861" cy="830997"/>
+      </dsp:txXfrm>
+    </dsp:sp>
+    <dsp:sp modelId="{D45D537F-AA06-49B5-B1E2-D1ECF653590D}">
+      <dsp:nvSpPr>
+        <dsp:cNvPr id="0" name=""/>
+        <dsp:cNvSpPr/>
+      </dsp:nvSpPr>
+      <dsp:spPr>
+        <a:xfrm>
+          <a:off x="4040265" y="0"/>
+          <a:ext cx="5032610" cy="830997"/>
+        </a:xfrm>
+        <a:prstGeom prst="chevron">
+          <a:avLst/>
+        </a:prstGeom>
+        <a:solidFill>
+          <a:schemeClr val="accent5">
+            <a:hueOff val="-6758543"/>
+            <a:satOff val="-17419"/>
+            <a:lumOff val="-11765"/>
+            <a:alphaOff val="0"/>
+          </a:schemeClr>
+        </a:solidFill>
+        <a:ln w="12700" cap="flat" cmpd="sng" algn="ctr">
+          <a:solidFill>
+            <a:schemeClr val="lt1">
+              <a:hueOff val="0"/>
+              <a:satOff val="0"/>
+              <a:lumOff val="0"/>
+              <a:alphaOff val="0"/>
+            </a:schemeClr>
+          </a:solidFill>
+          <a:prstDash val="solid"/>
+          <a:miter lim="800000"/>
+        </a:ln>
+        <a:effectLst/>
+      </dsp:spPr>
+      <dsp:style>
+        <a:lnRef idx="2">
+          <a:scrgbClr r="0" g="0" b="0"/>
+        </a:lnRef>
+        <a:fillRef idx="1">
+          <a:scrgbClr r="0" g="0" b="0"/>
+        </a:fillRef>
+        <a:effectRef idx="0">
+          <a:scrgbClr r="0" g="0" b="0"/>
+        </a:effectRef>
+        <a:fontRef idx="minor">
+          <a:schemeClr val="lt1"/>
+        </a:fontRef>
+      </dsp:style>
+      <dsp:txBody>
+        <a:bodyPr spcFirstLastPara="0" vert="horz" wrap="square" lIns="132017" tIns="88011" rIns="44006" bIns="88011" numCol="1" spcCol="1270" anchor="ctr" anchorCtr="0">
+          <a:noAutofit/>
+        </a:bodyPr>
+        <a:lstStyle/>
+        <a:p>
+          <a:pPr marL="0" lvl="0" indent="0" algn="ctr" defTabSz="1466850">
+            <a:lnSpc>
+              <a:spcPct val="90000"/>
+            </a:lnSpc>
+            <a:spcBef>
+              <a:spcPct val="0"/>
+            </a:spcBef>
+            <a:spcAft>
+              <a:spcPct val="35000"/>
+            </a:spcAft>
+            <a:buNone/>
+          </a:pPr>
+          <a:r>
+            <a:rPr kumimoji="1" lang="ja-JP" sz="3300" kern="1200" dirty="0"/>
+            <a:t>予測</a:t>
+          </a:r>
+          <a:r>
+            <a:rPr kumimoji="1" lang="ja-JP" altLang="en-US" sz="3300" kern="1200" dirty="0"/>
+            <a:t>・識別</a:t>
+          </a:r>
+          <a:endParaRPr lang="ja-JP" sz="3300" kern="1200" dirty="0"/>
+        </a:p>
+      </dsp:txBody>
+      <dsp:txXfrm>
+        <a:off x="4455764" y="0"/>
+        <a:ext cx="4201613" cy="830997"/>
       </dsp:txXfrm>
     </dsp:sp>
   </dsp:spTree>
@@ -7603,7 +7603,7 @@
           <a:p>
             <a:fld id="{2ABC02D7-CBD1-4D33-B166-78A898DF0F76}" type="datetimeFigureOut">
               <a:rPr kumimoji="1" lang="ja-JP" altLang="en-US" smtClean="0"/>
-              <a:t>2024/7/4</a:t>
+              <a:t>2025/6/5</a:t>
             </a:fld>
             <a:endParaRPr kumimoji="1" lang="ja-JP" altLang="en-US"/>
           </a:p>
@@ -7805,7 +7805,7 @@
           <a:p>
             <a:fld id="{2ABC02D7-CBD1-4D33-B166-78A898DF0F76}" type="datetimeFigureOut">
               <a:rPr kumimoji="1" lang="ja-JP" altLang="en-US" smtClean="0"/>
-              <a:t>2024/7/4</a:t>
+              <a:t>2025/6/5</a:t>
             </a:fld>
             <a:endParaRPr kumimoji="1" lang="ja-JP" altLang="en-US"/>
           </a:p>
@@ -8017,7 +8017,7 @@
           <a:p>
             <a:fld id="{2ABC02D7-CBD1-4D33-B166-78A898DF0F76}" type="datetimeFigureOut">
               <a:rPr kumimoji="1" lang="ja-JP" altLang="en-US" smtClean="0"/>
-              <a:t>2024/7/4</a:t>
+              <a:t>2025/6/5</a:t>
             </a:fld>
             <a:endParaRPr kumimoji="1" lang="ja-JP" altLang="en-US"/>
           </a:p>
@@ -8219,7 +8219,7 @@
           <a:p>
             <a:fld id="{2ABC02D7-CBD1-4D33-B166-78A898DF0F76}" type="datetimeFigureOut">
               <a:rPr kumimoji="1" lang="ja-JP" altLang="en-US" smtClean="0"/>
-              <a:t>2024/7/4</a:t>
+              <a:t>2025/6/5</a:t>
             </a:fld>
             <a:endParaRPr kumimoji="1" lang="ja-JP" altLang="en-US"/>
           </a:p>
@@ -8465,7 +8465,7 @@
           <a:p>
             <a:fld id="{2ABC02D7-CBD1-4D33-B166-78A898DF0F76}" type="datetimeFigureOut">
               <a:rPr kumimoji="1" lang="ja-JP" altLang="en-US" smtClean="0"/>
-              <a:t>2024/7/4</a:t>
+              <a:t>2025/6/5</a:t>
             </a:fld>
             <a:endParaRPr kumimoji="1" lang="ja-JP" altLang="en-US"/>
           </a:p>
@@ -8761,7 +8761,7 @@
           <a:p>
             <a:fld id="{2ABC02D7-CBD1-4D33-B166-78A898DF0F76}" type="datetimeFigureOut">
               <a:rPr kumimoji="1" lang="ja-JP" altLang="en-US" smtClean="0"/>
-              <a:t>2024/7/4</a:t>
+              <a:t>2025/6/5</a:t>
             </a:fld>
             <a:endParaRPr kumimoji="1" lang="ja-JP" altLang="en-US"/>
           </a:p>
@@ -9192,7 +9192,7 @@
           <a:p>
             <a:fld id="{2ABC02D7-CBD1-4D33-B166-78A898DF0F76}" type="datetimeFigureOut">
               <a:rPr kumimoji="1" lang="ja-JP" altLang="en-US" smtClean="0"/>
-              <a:t>2024/7/4</a:t>
+              <a:t>2025/6/5</a:t>
             </a:fld>
             <a:endParaRPr kumimoji="1" lang="ja-JP" altLang="en-US"/>
           </a:p>
@@ -9310,7 +9310,7 @@
           <a:p>
             <a:fld id="{2ABC02D7-CBD1-4D33-B166-78A898DF0F76}" type="datetimeFigureOut">
               <a:rPr kumimoji="1" lang="ja-JP" altLang="en-US" smtClean="0"/>
-              <a:t>2024/7/4</a:t>
+              <a:t>2025/6/5</a:t>
             </a:fld>
             <a:endParaRPr kumimoji="1" lang="ja-JP" altLang="en-US"/>
           </a:p>
@@ -9405,7 +9405,7 @@
           <a:p>
             <a:fld id="{2ABC02D7-CBD1-4D33-B166-78A898DF0F76}" type="datetimeFigureOut">
               <a:rPr kumimoji="1" lang="ja-JP" altLang="en-US" smtClean="0"/>
-              <a:t>2024/7/4</a:t>
+              <a:t>2025/6/5</a:t>
             </a:fld>
             <a:endParaRPr kumimoji="1" lang="ja-JP" altLang="en-US"/>
           </a:p>
@@ -9714,7 +9714,7 @@
           <a:p>
             <a:fld id="{2ABC02D7-CBD1-4D33-B166-78A898DF0F76}" type="datetimeFigureOut">
               <a:rPr kumimoji="1" lang="ja-JP" altLang="en-US" smtClean="0"/>
-              <a:t>2024/7/4</a:t>
+              <a:t>2025/6/5</a:t>
             </a:fld>
             <a:endParaRPr kumimoji="1" lang="ja-JP" altLang="en-US"/>
           </a:p>
@@ -9971,7 +9971,7 @@
           <a:p>
             <a:fld id="{2ABC02D7-CBD1-4D33-B166-78A898DF0F76}" type="datetimeFigureOut">
               <a:rPr kumimoji="1" lang="ja-JP" altLang="en-US" smtClean="0"/>
-              <a:t>2024/7/4</a:t>
+              <a:t>2025/6/5</a:t>
             </a:fld>
             <a:endParaRPr kumimoji="1" lang="ja-JP" altLang="en-US"/>
           </a:p>
@@ -10216,7 +10216,7 @@
           <a:p>
             <a:fld id="{2ABC02D7-CBD1-4D33-B166-78A898DF0F76}" type="datetimeFigureOut">
               <a:rPr kumimoji="1" lang="ja-JP" altLang="en-US" smtClean="0"/>
-              <a:t>2024/7/4</a:t>
+              <a:t>2025/6/5</a:t>
             </a:fld>
             <a:endParaRPr kumimoji="1" lang="ja-JP" altLang="en-US"/>
           </a:p>
@@ -10697,728 +10697,6 @@
           <a:chExt cx="0" cy="0"/>
         </a:xfrm>
       </p:grpSpPr>
-      <p:pic>
-        <p:nvPicPr>
-          <p:cNvPr id="2" name="Picture 2" descr="スクリーンショット 2016-05-04 3.33.02.png">
-            <a:extLst>
-              <a:ext uri="{FF2B5EF4-FFF2-40B4-BE49-F238E27FC236}">
-                <a16:creationId xmlns:a16="http://schemas.microsoft.com/office/drawing/2014/main" id="{47BADEAE-9B6E-ED3E-4A19-F89F9A9775F7}"/>
-              </a:ext>
-            </a:extLst>
-          </p:cNvPr>
-          <p:cNvPicPr>
-            <a:picLocks noChangeAspect="1" noChangeArrowheads="1"/>
-          </p:cNvPicPr>
-          <p:nvPr/>
-        </p:nvPicPr>
-        <p:blipFill>
-          <a:blip r:embed="rId2">
-            <a:extLst>
-              <a:ext uri="{28A0092B-C50C-407E-A947-70E740481C1C}">
-                <a14:useLocalDpi xmlns:a14="http://schemas.microsoft.com/office/drawing/2010/main" val="0"/>
-              </a:ext>
-            </a:extLst>
-          </a:blip>
-          <a:srcRect/>
-          <a:stretch>
-            <a:fillRect/>
-          </a:stretch>
-        </p:blipFill>
-        <p:spPr bwMode="auto">
-          <a:xfrm>
-            <a:off x="1298877" y="1166790"/>
-            <a:ext cx="4497070" cy="3310657"/>
-          </a:xfrm>
-          <a:prstGeom prst="rect">
-            <a:avLst/>
-          </a:prstGeom>
-          <a:noFill/>
-          <a:extLst>
-            <a:ext uri="{909E8E84-426E-40DD-AFC4-6F175D3DCCD1}">
-              <a14:hiddenFill xmlns:a14="http://schemas.microsoft.com/office/drawing/2010/main">
-                <a:solidFill>
-                  <a:srgbClr val="FFFFFF"/>
-                </a:solidFill>
-              </a14:hiddenFill>
-            </a:ext>
-          </a:extLst>
-        </p:spPr>
-      </p:pic>
-      <p:sp>
-        <p:nvSpPr>
-          <p:cNvPr id="3" name="テキスト ボックス 2">
-            <a:extLst>
-              <a:ext uri="{FF2B5EF4-FFF2-40B4-BE49-F238E27FC236}">
-                <a16:creationId xmlns:a16="http://schemas.microsoft.com/office/drawing/2014/main" id="{E7A76A66-6B5C-7F5C-0FC7-3DDC67D79355}"/>
-              </a:ext>
-            </a:extLst>
-          </p:cNvPr>
-          <p:cNvSpPr txBox="1"/>
-          <p:nvPr/>
-        </p:nvSpPr>
-        <p:spPr>
-          <a:xfrm>
-            <a:off x="1974575" y="3364058"/>
-            <a:ext cx="492443" cy="461665"/>
-          </a:xfrm>
-          <a:prstGeom prst="rect">
-            <a:avLst/>
-          </a:prstGeom>
-          <a:noFill/>
-        </p:spPr>
-        <p:txBody>
-          <a:bodyPr wrap="none" rtlCol="0">
-            <a:spAutoFit/>
-          </a:bodyPr>
-          <a:lstStyle/>
-          <a:p>
-            <a:pPr algn="l"/>
-            <a:r>
-              <a:rPr kumimoji="1" lang="ja-JP" altLang="en-US" sz="2400" dirty="0">
-                <a:solidFill>
-                  <a:schemeClr val="accent4">
-                    <a:lumMod val="60000"/>
-                    <a:lumOff val="40000"/>
-                  </a:schemeClr>
-                </a:solidFill>
-                <a:latin typeface="メイリオ" panose="020B0604030504040204" pitchFamily="50" charset="-128"/>
-                <a:ea typeface="メイリオ" panose="020B0604030504040204" pitchFamily="50" charset="-128"/>
-              </a:rPr>
-              <a:t>●</a:t>
-            </a:r>
-          </a:p>
-        </p:txBody>
-      </p:sp>
-      <p:sp>
-        <p:nvSpPr>
-          <p:cNvPr id="4" name="テキスト ボックス 3">
-            <a:extLst>
-              <a:ext uri="{FF2B5EF4-FFF2-40B4-BE49-F238E27FC236}">
-                <a16:creationId xmlns:a16="http://schemas.microsoft.com/office/drawing/2014/main" id="{F0EEF0E7-02DA-1EDA-BA1D-7CD05D79E283}"/>
-              </a:ext>
-            </a:extLst>
-          </p:cNvPr>
-          <p:cNvSpPr txBox="1"/>
-          <p:nvPr/>
-        </p:nvSpPr>
-        <p:spPr>
-          <a:xfrm>
-            <a:off x="2544419" y="1205617"/>
-            <a:ext cx="492443" cy="461665"/>
-          </a:xfrm>
-          <a:prstGeom prst="rect">
-            <a:avLst/>
-          </a:prstGeom>
-          <a:noFill/>
-        </p:spPr>
-        <p:txBody>
-          <a:bodyPr wrap="none" rtlCol="0">
-            <a:spAutoFit/>
-          </a:bodyPr>
-          <a:lstStyle/>
-          <a:p>
-            <a:pPr algn="l"/>
-            <a:r>
-              <a:rPr kumimoji="1" lang="ja-JP" altLang="en-US" sz="2400" dirty="0">
-                <a:solidFill>
-                  <a:schemeClr val="accent4">
-                    <a:lumMod val="60000"/>
-                    <a:lumOff val="40000"/>
-                  </a:schemeClr>
-                </a:solidFill>
-                <a:latin typeface="メイリオ" panose="020B0604030504040204" pitchFamily="50" charset="-128"/>
-                <a:ea typeface="メイリオ" panose="020B0604030504040204" pitchFamily="50" charset="-128"/>
-              </a:rPr>
-              <a:t>●</a:t>
-            </a:r>
-          </a:p>
-        </p:txBody>
-      </p:sp>
-      <p:sp>
-        <p:nvSpPr>
-          <p:cNvPr id="5" name="テキスト ボックス 4">
-            <a:extLst>
-              <a:ext uri="{FF2B5EF4-FFF2-40B4-BE49-F238E27FC236}">
-                <a16:creationId xmlns:a16="http://schemas.microsoft.com/office/drawing/2014/main" id="{31C561DB-6846-2052-5D3A-CAE5CC2CCE75}"/>
-              </a:ext>
-            </a:extLst>
-          </p:cNvPr>
-          <p:cNvSpPr txBox="1"/>
-          <p:nvPr/>
-        </p:nvSpPr>
-        <p:spPr>
-          <a:xfrm>
-            <a:off x="483005" y="395173"/>
-            <a:ext cx="4347665" cy="584775"/>
-          </a:xfrm>
-          <a:prstGeom prst="rect">
-            <a:avLst/>
-          </a:prstGeom>
-          <a:noFill/>
-        </p:spPr>
-        <p:txBody>
-          <a:bodyPr wrap="none" rtlCol="0">
-            <a:spAutoFit/>
-          </a:bodyPr>
-          <a:lstStyle/>
-          <a:p>
-            <a:pPr algn="l"/>
-            <a:r>
-              <a:rPr kumimoji="1" lang="en-US" altLang="ja-JP" sz="3200" dirty="0">
-                <a:latin typeface="メイリオ" panose="020B0604030504040204" pitchFamily="50" charset="-128"/>
-                <a:ea typeface="メイリオ" panose="020B0604030504040204" pitchFamily="50" charset="-128"/>
-              </a:rPr>
-              <a:t>KNN</a:t>
-            </a:r>
-            <a:r>
-              <a:rPr kumimoji="1" lang="ja-JP" altLang="en-US" sz="3200" dirty="0">
-                <a:latin typeface="メイリオ" panose="020B0604030504040204" pitchFamily="50" charset="-128"/>
-                <a:ea typeface="メイリオ" panose="020B0604030504040204" pitchFamily="50" charset="-128"/>
-              </a:rPr>
-              <a:t>による学習・予測</a:t>
-            </a:r>
-          </a:p>
-        </p:txBody>
-      </p:sp>
-      <p:sp>
-        <p:nvSpPr>
-          <p:cNvPr id="6" name="楕円 5">
-            <a:extLst>
-              <a:ext uri="{FF2B5EF4-FFF2-40B4-BE49-F238E27FC236}">
-                <a16:creationId xmlns:a16="http://schemas.microsoft.com/office/drawing/2014/main" id="{DF6481F8-0492-0D0A-CC2B-5BB6C0323B57}"/>
-              </a:ext>
-            </a:extLst>
-          </p:cNvPr>
-          <p:cNvSpPr/>
-          <p:nvPr/>
-        </p:nvSpPr>
-        <p:spPr>
-          <a:xfrm>
-            <a:off x="3333751" y="2569923"/>
-            <a:ext cx="342900" cy="371475"/>
-          </a:xfrm>
-          <a:prstGeom prst="ellipse">
-            <a:avLst/>
-          </a:prstGeom>
-          <a:solidFill>
-            <a:schemeClr val="bg1"/>
-          </a:solidFill>
-          <a:ln>
-            <a:solidFill>
-              <a:schemeClr val="bg1"/>
-            </a:solidFill>
-          </a:ln>
-        </p:spPr>
-        <p:style>
-          <a:lnRef idx="2">
-            <a:schemeClr val="accent1">
-              <a:shade val="50000"/>
-            </a:schemeClr>
-          </a:lnRef>
-          <a:fillRef idx="1">
-            <a:schemeClr val="accent1"/>
-          </a:fillRef>
-          <a:effectRef idx="0">
-            <a:schemeClr val="accent1"/>
-          </a:effectRef>
-          <a:fontRef idx="minor">
-            <a:schemeClr val="lt1"/>
-          </a:fontRef>
-        </p:style>
-        <p:txBody>
-          <a:bodyPr rtlCol="0" anchor="ctr"/>
-          <a:lstStyle/>
-          <a:p>
-            <a:pPr algn="ctr"/>
-            <a:endParaRPr kumimoji="1" lang="ja-JP" altLang="en-US"/>
-          </a:p>
-        </p:txBody>
-      </p:sp>
-      <p:sp>
-        <p:nvSpPr>
-          <p:cNvPr id="7" name="テキスト ボックス 6">
-            <a:extLst>
-              <a:ext uri="{FF2B5EF4-FFF2-40B4-BE49-F238E27FC236}">
-                <a16:creationId xmlns:a16="http://schemas.microsoft.com/office/drawing/2014/main" id="{39621FFF-83B7-160B-2205-C033DB38BD26}"/>
-              </a:ext>
-            </a:extLst>
-          </p:cNvPr>
-          <p:cNvSpPr txBox="1"/>
-          <p:nvPr/>
-        </p:nvSpPr>
-        <p:spPr>
-          <a:xfrm>
-            <a:off x="1391051" y="4361368"/>
-            <a:ext cx="4943475" cy="830997"/>
-          </a:xfrm>
-          <a:prstGeom prst="rect">
-            <a:avLst/>
-          </a:prstGeom>
-          <a:noFill/>
-        </p:spPr>
-        <p:txBody>
-          <a:bodyPr wrap="square" rtlCol="0">
-            <a:spAutoFit/>
-          </a:bodyPr>
-          <a:lstStyle/>
-          <a:p>
-            <a:pPr algn="l"/>
-            <a:r>
-              <a:rPr kumimoji="1" lang="ja-JP" altLang="en-US" sz="2400" dirty="0">
-                <a:latin typeface="メイリオ" panose="020B0604030504040204" pitchFamily="50" charset="-128"/>
-                <a:ea typeface="メイリオ" panose="020B0604030504040204" pitchFamily="50" charset="-128"/>
-              </a:rPr>
-              <a:t>最近傍の点の数</a:t>
-            </a:r>
-            <a:r>
-              <a:rPr kumimoji="1" lang="en-US" altLang="ja-JP" sz="2400" dirty="0">
-                <a:latin typeface="メイリオ" panose="020B0604030504040204" pitchFamily="50" charset="-128"/>
-                <a:ea typeface="メイリオ" panose="020B0604030504040204" pitchFamily="50" charset="-128"/>
-              </a:rPr>
-              <a:t>(K)</a:t>
-            </a:r>
-            <a:r>
-              <a:rPr kumimoji="1" lang="ja-JP" altLang="en-US" sz="2400" dirty="0">
-                <a:latin typeface="メイリオ" panose="020B0604030504040204" pitchFamily="50" charset="-128"/>
-                <a:ea typeface="メイリオ" panose="020B0604030504040204" pitchFamily="50" charset="-128"/>
-              </a:rPr>
-              <a:t>を決める（点線の円がいわば決定境界</a:t>
-            </a:r>
-            <a:r>
-              <a:rPr kumimoji="1" lang="en-US" altLang="ja-JP" sz="2400" dirty="0">
-                <a:latin typeface="メイリオ" panose="020B0604030504040204" pitchFamily="50" charset="-128"/>
-                <a:ea typeface="メイリオ" panose="020B0604030504040204" pitchFamily="50" charset="-128"/>
-              </a:rPr>
-              <a:t>(</a:t>
-            </a:r>
-            <a:r>
-              <a:rPr kumimoji="1" lang="ja-JP" altLang="en-US" sz="2400" dirty="0">
-                <a:latin typeface="メイリオ" panose="020B0604030504040204" pitchFamily="50" charset="-128"/>
-                <a:ea typeface="メイリオ" panose="020B0604030504040204" pitchFamily="50" charset="-128"/>
-              </a:rPr>
-              <a:t>注</a:t>
-            </a:r>
-            <a:r>
-              <a:rPr kumimoji="1" lang="en-US" altLang="ja-JP" sz="2400" dirty="0">
-                <a:latin typeface="メイリオ" panose="020B0604030504040204" pitchFamily="50" charset="-128"/>
-                <a:ea typeface="メイリオ" panose="020B0604030504040204" pitchFamily="50" charset="-128"/>
-              </a:rPr>
-              <a:t>)</a:t>
-            </a:r>
-            <a:r>
-              <a:rPr kumimoji="1" lang="ja-JP" altLang="en-US" sz="2400" dirty="0">
-                <a:latin typeface="メイリオ" panose="020B0604030504040204" pitchFamily="50" charset="-128"/>
-                <a:ea typeface="メイリオ" panose="020B0604030504040204" pitchFamily="50" charset="-128"/>
-              </a:rPr>
-              <a:t>）</a:t>
-            </a:r>
-          </a:p>
-        </p:txBody>
-      </p:sp>
-      <p:pic>
-        <p:nvPicPr>
-          <p:cNvPr id="8" name="Picture 2" descr="スクリーンショット 2016-05-04 3.33.02.png">
-            <a:extLst>
-              <a:ext uri="{FF2B5EF4-FFF2-40B4-BE49-F238E27FC236}">
-                <a16:creationId xmlns:a16="http://schemas.microsoft.com/office/drawing/2014/main" id="{B66AEAD5-C25C-E045-155C-2AC26CF03D65}"/>
-              </a:ext>
-            </a:extLst>
-          </p:cNvPr>
-          <p:cNvPicPr>
-            <a:picLocks noChangeAspect="1" noChangeArrowheads="1"/>
-          </p:cNvPicPr>
-          <p:nvPr/>
-        </p:nvPicPr>
-        <p:blipFill>
-          <a:blip r:embed="rId2">
-            <a:extLst>
-              <a:ext uri="{28A0092B-C50C-407E-A947-70E740481C1C}">
-                <a14:useLocalDpi xmlns:a14="http://schemas.microsoft.com/office/drawing/2010/main" val="0"/>
-              </a:ext>
-            </a:extLst>
-          </a:blip>
-          <a:srcRect/>
-          <a:stretch>
-            <a:fillRect/>
-          </a:stretch>
-        </p:blipFill>
-        <p:spPr bwMode="auto">
-          <a:xfrm>
-            <a:off x="6275705" y="1205617"/>
-            <a:ext cx="4497070" cy="3310657"/>
-          </a:xfrm>
-          <a:prstGeom prst="rect">
-            <a:avLst/>
-          </a:prstGeom>
-          <a:noFill/>
-          <a:extLst>
-            <a:ext uri="{909E8E84-426E-40DD-AFC4-6F175D3DCCD1}">
-              <a14:hiddenFill xmlns:a14="http://schemas.microsoft.com/office/drawing/2010/main">
-                <a:solidFill>
-                  <a:srgbClr val="FFFFFF"/>
-                </a:solidFill>
-              </a14:hiddenFill>
-            </a:ext>
-          </a:extLst>
-        </p:spPr>
-      </p:pic>
-      <p:sp>
-        <p:nvSpPr>
-          <p:cNvPr id="9" name="テキスト ボックス 8">
-            <a:extLst>
-              <a:ext uri="{FF2B5EF4-FFF2-40B4-BE49-F238E27FC236}">
-                <a16:creationId xmlns:a16="http://schemas.microsoft.com/office/drawing/2014/main" id="{237EBFC5-0100-3091-7E54-92A6034614B3}"/>
-              </a:ext>
-            </a:extLst>
-          </p:cNvPr>
-          <p:cNvSpPr txBox="1"/>
-          <p:nvPr/>
-        </p:nvSpPr>
-        <p:spPr>
-          <a:xfrm>
-            <a:off x="6899000" y="3418634"/>
-            <a:ext cx="492443" cy="461665"/>
-          </a:xfrm>
-          <a:prstGeom prst="rect">
-            <a:avLst/>
-          </a:prstGeom>
-          <a:noFill/>
-        </p:spPr>
-        <p:txBody>
-          <a:bodyPr wrap="none" rtlCol="0">
-            <a:spAutoFit/>
-          </a:bodyPr>
-          <a:lstStyle/>
-          <a:p>
-            <a:pPr algn="l"/>
-            <a:r>
-              <a:rPr kumimoji="1" lang="ja-JP" altLang="en-US" sz="2400" dirty="0">
-                <a:solidFill>
-                  <a:schemeClr val="accent4">
-                    <a:lumMod val="60000"/>
-                    <a:lumOff val="40000"/>
-                  </a:schemeClr>
-                </a:solidFill>
-                <a:latin typeface="メイリオ" panose="020B0604030504040204" pitchFamily="50" charset="-128"/>
-                <a:ea typeface="メイリオ" panose="020B0604030504040204" pitchFamily="50" charset="-128"/>
-              </a:rPr>
-              <a:t>●</a:t>
-            </a:r>
-          </a:p>
-        </p:txBody>
-      </p:sp>
-      <p:sp>
-        <p:nvSpPr>
-          <p:cNvPr id="10" name="テキスト ボックス 9">
-            <a:extLst>
-              <a:ext uri="{FF2B5EF4-FFF2-40B4-BE49-F238E27FC236}">
-                <a16:creationId xmlns:a16="http://schemas.microsoft.com/office/drawing/2014/main" id="{08B51688-D6A7-B96D-E9DC-6866C73F14DE}"/>
-              </a:ext>
-            </a:extLst>
-          </p:cNvPr>
-          <p:cNvSpPr txBox="1"/>
-          <p:nvPr/>
-        </p:nvSpPr>
-        <p:spPr>
-          <a:xfrm>
-            <a:off x="7468844" y="1260193"/>
-            <a:ext cx="492443" cy="461665"/>
-          </a:xfrm>
-          <a:prstGeom prst="rect">
-            <a:avLst/>
-          </a:prstGeom>
-          <a:noFill/>
-        </p:spPr>
-        <p:txBody>
-          <a:bodyPr wrap="none" rtlCol="0">
-            <a:spAutoFit/>
-          </a:bodyPr>
-          <a:lstStyle/>
-          <a:p>
-            <a:pPr algn="l"/>
-            <a:r>
-              <a:rPr kumimoji="1" lang="ja-JP" altLang="en-US" sz="2400" dirty="0">
-                <a:solidFill>
-                  <a:schemeClr val="accent4">
-                    <a:lumMod val="60000"/>
-                    <a:lumOff val="40000"/>
-                  </a:schemeClr>
-                </a:solidFill>
-                <a:latin typeface="メイリオ" panose="020B0604030504040204" pitchFamily="50" charset="-128"/>
-                <a:ea typeface="メイリオ" panose="020B0604030504040204" pitchFamily="50" charset="-128"/>
-              </a:rPr>
-              <a:t>●</a:t>
-            </a:r>
-          </a:p>
-        </p:txBody>
-      </p:sp>
-      <p:sp>
-        <p:nvSpPr>
-          <p:cNvPr id="13" name="テキスト ボックス 12">
-            <a:extLst>
-              <a:ext uri="{FF2B5EF4-FFF2-40B4-BE49-F238E27FC236}">
-                <a16:creationId xmlns:a16="http://schemas.microsoft.com/office/drawing/2014/main" id="{FE934083-C53D-A803-449B-1C16AC829C31}"/>
-              </a:ext>
-            </a:extLst>
-          </p:cNvPr>
-          <p:cNvSpPr txBox="1"/>
-          <p:nvPr/>
-        </p:nvSpPr>
-        <p:spPr>
-          <a:xfrm>
-            <a:off x="7235222" y="4246615"/>
-            <a:ext cx="2864887" cy="461665"/>
-          </a:xfrm>
-          <a:prstGeom prst="rect">
-            <a:avLst/>
-          </a:prstGeom>
-          <a:noFill/>
-        </p:spPr>
-        <p:txBody>
-          <a:bodyPr wrap="none" rtlCol="0">
-            <a:spAutoFit/>
-          </a:bodyPr>
-          <a:lstStyle/>
-          <a:p>
-            <a:pPr algn="l"/>
-            <a:r>
-              <a:rPr kumimoji="1" lang="en-US" altLang="ja-JP" sz="2400" dirty="0">
-                <a:latin typeface="メイリオ" panose="020B0604030504040204" pitchFamily="50" charset="-128"/>
-                <a:ea typeface="メイリオ" panose="020B0604030504040204" pitchFamily="50" charset="-128"/>
-              </a:rPr>
-              <a:t>K=3 : </a:t>
-            </a:r>
-            <a:r>
-              <a:rPr kumimoji="1" lang="ja-JP" altLang="en-US" sz="2400" dirty="0">
-                <a:solidFill>
-                  <a:srgbClr val="FF0000"/>
-                </a:solidFill>
-                <a:latin typeface="メイリオ" panose="020B0604030504040204" pitchFamily="50" charset="-128"/>
-                <a:ea typeface="メイリオ" panose="020B0604030504040204" pitchFamily="50" charset="-128"/>
-              </a:rPr>
-              <a:t>★</a:t>
-            </a:r>
-            <a:r>
-              <a:rPr kumimoji="1" lang="ja-JP" altLang="en-US" sz="2400" dirty="0">
-                <a:latin typeface="メイリオ" panose="020B0604030504040204" pitchFamily="50" charset="-128"/>
-                <a:ea typeface="メイリオ" panose="020B0604030504040204" pitchFamily="50" charset="-128"/>
-              </a:rPr>
-              <a:t>は</a:t>
-            </a:r>
-            <a:r>
-              <a:rPr kumimoji="1" lang="en-US" altLang="ja-JP" sz="2400" dirty="0">
-                <a:latin typeface="メイリオ" panose="020B0604030504040204" pitchFamily="50" charset="-128"/>
-                <a:ea typeface="メイリオ" panose="020B0604030504040204" pitchFamily="50" charset="-128"/>
-              </a:rPr>
-              <a:t>Class B</a:t>
-            </a:r>
-            <a:endParaRPr kumimoji="1" lang="ja-JP" altLang="en-US" sz="2400" dirty="0">
-              <a:latin typeface="メイリオ" panose="020B0604030504040204" pitchFamily="50" charset="-128"/>
-              <a:ea typeface="メイリオ" panose="020B0604030504040204" pitchFamily="50" charset="-128"/>
-            </a:endParaRPr>
-          </a:p>
-        </p:txBody>
-      </p:sp>
-      <p:sp>
-        <p:nvSpPr>
-          <p:cNvPr id="14" name="テキスト ボックス 13">
-            <a:extLst>
-              <a:ext uri="{FF2B5EF4-FFF2-40B4-BE49-F238E27FC236}">
-                <a16:creationId xmlns:a16="http://schemas.microsoft.com/office/drawing/2014/main" id="{24CB0954-FCFC-B8F7-0482-02A2C0433FC9}"/>
-              </a:ext>
-            </a:extLst>
-          </p:cNvPr>
-          <p:cNvSpPr txBox="1"/>
-          <p:nvPr/>
-        </p:nvSpPr>
-        <p:spPr>
-          <a:xfrm>
-            <a:off x="7233619" y="4664253"/>
-            <a:ext cx="2866490" cy="461665"/>
-          </a:xfrm>
-          <a:prstGeom prst="rect">
-            <a:avLst/>
-          </a:prstGeom>
-          <a:noFill/>
-        </p:spPr>
-        <p:txBody>
-          <a:bodyPr wrap="none" rtlCol="0">
-            <a:spAutoFit/>
-          </a:bodyPr>
-          <a:lstStyle/>
-          <a:p>
-            <a:pPr algn="l"/>
-            <a:r>
-              <a:rPr kumimoji="1" lang="en-US" altLang="ja-JP" sz="2400" dirty="0">
-                <a:latin typeface="メイリオ" panose="020B0604030504040204" pitchFamily="50" charset="-128"/>
-                <a:ea typeface="メイリオ" panose="020B0604030504040204" pitchFamily="50" charset="-128"/>
-              </a:rPr>
-              <a:t>K=6 : </a:t>
-            </a:r>
-            <a:r>
-              <a:rPr kumimoji="1" lang="ja-JP" altLang="en-US" sz="2400" dirty="0">
-                <a:solidFill>
-                  <a:srgbClr val="FF0000"/>
-                </a:solidFill>
-                <a:latin typeface="メイリオ" panose="020B0604030504040204" pitchFamily="50" charset="-128"/>
-                <a:ea typeface="メイリオ" panose="020B0604030504040204" pitchFamily="50" charset="-128"/>
-              </a:rPr>
-              <a:t>★</a:t>
-            </a:r>
-            <a:r>
-              <a:rPr kumimoji="1" lang="ja-JP" altLang="en-US" sz="2400" dirty="0">
-                <a:latin typeface="メイリオ" panose="020B0604030504040204" pitchFamily="50" charset="-128"/>
-                <a:ea typeface="メイリオ" panose="020B0604030504040204" pitchFamily="50" charset="-128"/>
-              </a:rPr>
-              <a:t>は</a:t>
-            </a:r>
-            <a:r>
-              <a:rPr kumimoji="1" lang="en-US" altLang="ja-JP" sz="2400" dirty="0">
-                <a:latin typeface="メイリオ" panose="020B0604030504040204" pitchFamily="50" charset="-128"/>
-                <a:ea typeface="メイリオ" panose="020B0604030504040204" pitchFamily="50" charset="-128"/>
-              </a:rPr>
-              <a:t>Class A</a:t>
-            </a:r>
-            <a:endParaRPr kumimoji="1" lang="ja-JP" altLang="en-US" sz="2400" dirty="0">
-              <a:latin typeface="メイリオ" panose="020B0604030504040204" pitchFamily="50" charset="-128"/>
-              <a:ea typeface="メイリオ" panose="020B0604030504040204" pitchFamily="50" charset="-128"/>
-            </a:endParaRPr>
-          </a:p>
-        </p:txBody>
-      </p:sp>
-      <p:graphicFrame>
-        <p:nvGraphicFramePr>
-          <p:cNvPr id="18" name="図表 17">
-            <a:extLst>
-              <a:ext uri="{FF2B5EF4-FFF2-40B4-BE49-F238E27FC236}">
-                <a16:creationId xmlns:a16="http://schemas.microsoft.com/office/drawing/2014/main" id="{5A6A8792-1AE3-BD6C-04E1-92671CFEF200}"/>
-              </a:ext>
-            </a:extLst>
-          </p:cNvPr>
-          <p:cNvGraphicFramePr/>
-          <p:nvPr/>
-        </p:nvGraphicFramePr>
-        <p:xfrm>
-          <a:off x="1974575" y="5154415"/>
-          <a:ext cx="9072876" cy="830997"/>
-        </p:xfrm>
-        <a:graphic>
-          <a:graphicData uri="http://schemas.openxmlformats.org/drawingml/2006/diagram">
-            <dgm:relIds xmlns:dgm="http://schemas.openxmlformats.org/drawingml/2006/diagram" xmlns:r="http://schemas.openxmlformats.org/officeDocument/2006/relationships" r:dm="rId3" r:lo="rId4" r:qs="rId5" r:cs="rId6"/>
-          </a:graphicData>
-        </a:graphic>
-      </p:graphicFrame>
-      <p:sp>
-        <p:nvSpPr>
-          <p:cNvPr id="19" name="テキスト ボックス 18">
-            <a:extLst>
-              <a:ext uri="{FF2B5EF4-FFF2-40B4-BE49-F238E27FC236}">
-                <a16:creationId xmlns:a16="http://schemas.microsoft.com/office/drawing/2014/main" id="{A023EEA0-2B33-9711-ED46-45F183E742C2}"/>
-              </a:ext>
-            </a:extLst>
-          </p:cNvPr>
-          <p:cNvSpPr txBox="1"/>
-          <p:nvPr/>
-        </p:nvSpPr>
-        <p:spPr>
-          <a:xfrm>
-            <a:off x="874380" y="6001162"/>
-            <a:ext cx="10965195" cy="923330"/>
-          </a:xfrm>
-          <a:prstGeom prst="rect">
-            <a:avLst/>
-          </a:prstGeom>
-          <a:noFill/>
-        </p:spPr>
-        <p:txBody>
-          <a:bodyPr wrap="square" rtlCol="0">
-            <a:spAutoFit/>
-          </a:bodyPr>
-          <a:lstStyle/>
-          <a:p>
-            <a:pPr algn="l"/>
-            <a:r>
-              <a:rPr kumimoji="1" lang="ja-JP" altLang="en-US" dirty="0">
-                <a:latin typeface="メイリオ" panose="020B0604030504040204" pitchFamily="50" charset="-128"/>
-                <a:ea typeface="メイリオ" panose="020B0604030504040204" pitchFamily="50" charset="-128"/>
-              </a:rPr>
-              <a:t>（注）★が与えられた都度円が変わる。つまり今まで述べてきた固定的な決定境界を引いているわけではないので学習してないとも言える（</a:t>
-            </a:r>
-            <a:r>
-              <a:rPr kumimoji="1" lang="en-US" altLang="ja-JP" dirty="0">
-                <a:latin typeface="メイリオ" panose="020B0604030504040204" pitchFamily="50" charset="-128"/>
-                <a:ea typeface="メイリオ" panose="020B0604030504040204" pitchFamily="50" charset="-128"/>
-              </a:rPr>
-              <a:t>p.179</a:t>
-            </a:r>
-            <a:r>
-              <a:rPr kumimoji="1" lang="ja-JP" altLang="en-US" dirty="0">
-                <a:latin typeface="メイリオ" panose="020B0604030504040204" pitchFamily="50" charset="-128"/>
-                <a:ea typeface="メイリオ" panose="020B0604030504040204" pitchFamily="50" charset="-128"/>
-              </a:rPr>
-              <a:t>中段：「</a:t>
-            </a:r>
-            <a:r>
-              <a:rPr kumimoji="1" lang="en-US" altLang="ja-JP" dirty="0">
-                <a:latin typeface="メイリオ" panose="020B0604030504040204" pitchFamily="50" charset="-128"/>
-                <a:ea typeface="メイリオ" panose="020B0604030504040204" pitchFamily="50" charset="-128"/>
-              </a:rPr>
-              <a:t>KNN</a:t>
-            </a:r>
-            <a:r>
-              <a:rPr kumimoji="1" lang="ja-JP" altLang="en-US" dirty="0">
-                <a:latin typeface="メイリオ" panose="020B0604030504040204" pitchFamily="50" charset="-128"/>
-                <a:ea typeface="メイリオ" panose="020B0604030504040204" pitchFamily="50" charset="-128"/>
-              </a:rPr>
-              <a:t>には学習というフェーズがない」）が、</a:t>
-            </a:r>
-            <a:r>
-              <a:rPr kumimoji="1" lang="en-US" altLang="ja-JP" dirty="0">
-                <a:latin typeface="メイリオ" panose="020B0604030504040204" pitchFamily="50" charset="-128"/>
-                <a:ea typeface="メイリオ" panose="020B0604030504040204" pitchFamily="50" charset="-128"/>
-              </a:rPr>
-              <a:t>K</a:t>
-            </a:r>
-            <a:r>
-              <a:rPr kumimoji="1" lang="ja-JP" altLang="en-US" dirty="0">
-                <a:latin typeface="メイリオ" panose="020B0604030504040204" pitchFamily="50" charset="-128"/>
-                <a:ea typeface="メイリオ" panose="020B0604030504040204" pitchFamily="50" charset="-128"/>
-              </a:rPr>
-              <a:t>を決めることが円の大きさを決めるので学習とみなします。</a:t>
-            </a:r>
-          </a:p>
-        </p:txBody>
-      </p:sp>
-    </p:spTree>
-    <p:extLst>
-      <p:ext uri="{BB962C8B-B14F-4D97-AF65-F5344CB8AC3E}">
-        <p14:creationId xmlns:p14="http://schemas.microsoft.com/office/powerpoint/2010/main" val="2043508112"/>
-      </p:ext>
-    </p:extLst>
-  </p:cSld>
-  <p:clrMapOvr>
-    <a:masterClrMapping/>
-  </p:clrMapOvr>
-</p:sld>
-</file>
-
-<file path=ppt/slides/slide11.xml><?xml version="1.0" encoding="utf-8"?>
-<p:sld xmlns:a="http://schemas.openxmlformats.org/drawingml/2006/main" xmlns:r="http://schemas.openxmlformats.org/officeDocument/2006/relationships" xmlns:p="http://schemas.openxmlformats.org/presentationml/2006/main">
-  <p:cSld>
-    <p:spTree>
-      <p:nvGrpSpPr>
-        <p:cNvPr id="1" name=""/>
-        <p:cNvGrpSpPr/>
-        <p:nvPr/>
-      </p:nvGrpSpPr>
-      <p:grpSpPr>
-        <a:xfrm>
-          <a:off x="0" y="0"/>
-          <a:ext cx="0" cy="0"/>
-          <a:chOff x="0" y="0"/>
-          <a:chExt cx="0" cy="0"/>
-        </a:xfrm>
-      </p:grpSpPr>
       <p:sp>
         <p:nvSpPr>
           <p:cNvPr id="2" name="テキスト ボックス 1">
@@ -12098,7 +11376,7 @@
 </p:sld>
 </file>
 
-<file path=ppt/slides/slide12.xml><?xml version="1.0" encoding="utf-8"?>
+<file path=ppt/slides/slide11.xml><?xml version="1.0" encoding="utf-8"?>
 <p:sld xmlns:a="http://schemas.openxmlformats.org/drawingml/2006/main" xmlns:r="http://schemas.openxmlformats.org/officeDocument/2006/relationships" xmlns:p="http://schemas.openxmlformats.org/presentationml/2006/main">
   <p:cSld>
     <p:spTree>
@@ -13754,7 +13032,7 @@
 </p:sld>
 </file>
 
-<file path=ppt/slides/slide13.xml><?xml version="1.0" encoding="utf-8"?>
+<file path=ppt/slides/slide12.xml><?xml version="1.0" encoding="utf-8"?>
 <p:sld xmlns:a="http://schemas.openxmlformats.org/drawingml/2006/main" xmlns:r="http://schemas.openxmlformats.org/officeDocument/2006/relationships" xmlns:p="http://schemas.openxmlformats.org/presentationml/2006/main">
   <p:cSld>
     <p:spTree>
@@ -13823,7 +13101,7 @@
 </p:sld>
 </file>
 
-<file path=ppt/slides/slide14.xml><?xml version="1.0" encoding="utf-8"?>
+<file path=ppt/slides/slide13.xml><?xml version="1.0" encoding="utf-8"?>
 <p:sld xmlns:a="http://schemas.openxmlformats.org/drawingml/2006/main" xmlns:r="http://schemas.openxmlformats.org/officeDocument/2006/relationships" xmlns:p="http://schemas.openxmlformats.org/presentationml/2006/main">
   <p:cSld>
     <p:spTree>
@@ -16716,7 +15994,7 @@
 </p:sld>
 </file>
 
-<file path=ppt/slides/slide15.xml><?xml version="1.0" encoding="utf-8"?>
+<file path=ppt/slides/slide14.xml><?xml version="1.0" encoding="utf-8"?>
 <p:sld xmlns:a="http://schemas.openxmlformats.org/drawingml/2006/main" xmlns:r="http://schemas.openxmlformats.org/officeDocument/2006/relationships" xmlns:p="http://schemas.openxmlformats.org/presentationml/2006/main">
   <p:cSld>
     <p:spTree>
@@ -17103,7 +16381,7 @@
 </p:sld>
 </file>
 
-<file path=ppt/slides/slide16.xml><?xml version="1.0" encoding="utf-8"?>
+<file path=ppt/slides/slide15.xml><?xml version="1.0" encoding="utf-8"?>
 <p:sld xmlns:a="http://schemas.openxmlformats.org/drawingml/2006/main" xmlns:r="http://schemas.openxmlformats.org/officeDocument/2006/relationships" xmlns:p="http://schemas.openxmlformats.org/presentationml/2006/main">
   <p:cSld>
     <p:spTree>
@@ -17556,7 +16834,7 @@
 </p:sld>
 </file>
 
-<file path=ppt/slides/slide17.xml><?xml version="1.0" encoding="utf-8"?>
+<file path=ppt/slides/slide16.xml><?xml version="1.0" encoding="utf-8"?>
 <p:sld xmlns:a="http://schemas.openxmlformats.org/drawingml/2006/main" xmlns:r="http://schemas.openxmlformats.org/officeDocument/2006/relationships" xmlns:p="http://schemas.openxmlformats.org/presentationml/2006/main">
   <p:cSld>
     <p:spTree>
@@ -20600,7 +19878,7 @@
 </p:sld>
 </file>
 
-<file path=ppt/slides/slide18.xml><?xml version="1.0" encoding="utf-8"?>
+<file path=ppt/slides/slide17.xml><?xml version="1.0" encoding="utf-8"?>
 <p:sld xmlns:a="http://schemas.openxmlformats.org/drawingml/2006/main" xmlns:r="http://schemas.openxmlformats.org/officeDocument/2006/relationships" xmlns:p="http://schemas.openxmlformats.org/presentationml/2006/main">
   <p:cSld>
     <p:spTree>
@@ -21597,7 +20875,7 @@
 </p:sld>
 </file>
 
-<file path=ppt/slides/slide19.xml><?xml version="1.0" encoding="utf-8"?>
+<file path=ppt/slides/slide18.xml><?xml version="1.0" encoding="utf-8"?>
 <p:sld xmlns:a="http://schemas.openxmlformats.org/drawingml/2006/main" xmlns:r="http://schemas.openxmlformats.org/officeDocument/2006/relationships" xmlns:p="http://schemas.openxmlformats.org/presentationml/2006/main">
   <p:cSld>
     <p:spTree>
@@ -21762,6 +21040,270 @@
     <p:extLst>
       <p:ext uri="{BB962C8B-B14F-4D97-AF65-F5344CB8AC3E}">
         <p14:creationId xmlns:p14="http://schemas.microsoft.com/office/powerpoint/2010/main" val="3998612377"/>
+      </p:ext>
+    </p:extLst>
+  </p:cSld>
+  <p:clrMapOvr>
+    <a:masterClrMapping/>
+  </p:clrMapOvr>
+</p:sld>
+</file>
+
+<file path=ppt/slides/slide19.xml><?xml version="1.0" encoding="utf-8"?>
+<p:sld xmlns:a="http://schemas.openxmlformats.org/drawingml/2006/main" xmlns:r="http://schemas.openxmlformats.org/officeDocument/2006/relationships" xmlns:p="http://schemas.openxmlformats.org/presentationml/2006/main">
+  <p:cSld>
+    <p:spTree>
+      <p:nvGrpSpPr>
+        <p:cNvPr id="1" name=""/>
+        <p:cNvGrpSpPr/>
+        <p:nvPr/>
+      </p:nvGrpSpPr>
+      <p:grpSpPr>
+        <a:xfrm>
+          <a:off x="0" y="0"/>
+          <a:ext cx="0" cy="0"/>
+          <a:chOff x="0" y="0"/>
+          <a:chExt cx="0" cy="0"/>
+        </a:xfrm>
+      </p:grpSpPr>
+      <p:sp>
+        <p:nvSpPr>
+          <p:cNvPr id="5" name="テキスト ボックス 4">
+            <a:extLst>
+              <a:ext uri="{FF2B5EF4-FFF2-40B4-BE49-F238E27FC236}">
+                <a16:creationId xmlns:a16="http://schemas.microsoft.com/office/drawing/2014/main" id="{31C561DB-6846-2052-5D3A-CAE5CC2CCE75}"/>
+              </a:ext>
+            </a:extLst>
+          </p:cNvPr>
+          <p:cNvSpPr txBox="1"/>
+          <p:nvPr/>
+        </p:nvSpPr>
+        <p:spPr>
+          <a:xfrm>
+            <a:off x="483005" y="395173"/>
+            <a:ext cx="7160935" cy="584775"/>
+          </a:xfrm>
+          <a:prstGeom prst="rect">
+            <a:avLst/>
+          </a:prstGeom>
+          <a:noFill/>
+        </p:spPr>
+        <p:txBody>
+          <a:bodyPr wrap="none" rtlCol="0">
+            <a:spAutoFit/>
+          </a:bodyPr>
+          <a:lstStyle/>
+          <a:p>
+            <a:pPr algn="l"/>
+            <a:r>
+              <a:rPr kumimoji="1" lang="ja-JP" altLang="en-US" sz="3200" dirty="0">
+                <a:latin typeface="メイリオ" panose="020B0604030504040204" pitchFamily="50" charset="-128"/>
+                <a:ea typeface="メイリオ" panose="020B0604030504040204" pitchFamily="50" charset="-128"/>
+              </a:rPr>
+              <a:t>テキストマイニングの流れ（まとめ）</a:t>
+            </a:r>
+          </a:p>
+        </p:txBody>
+      </p:sp>
+      <p:graphicFrame>
+        <p:nvGraphicFramePr>
+          <p:cNvPr id="18" name="図表 17">
+            <a:extLst>
+              <a:ext uri="{FF2B5EF4-FFF2-40B4-BE49-F238E27FC236}">
+                <a16:creationId xmlns:a16="http://schemas.microsoft.com/office/drawing/2014/main" id="{5A6A8792-1AE3-BD6C-04E1-92671CFEF200}"/>
+              </a:ext>
+            </a:extLst>
+          </p:cNvPr>
+          <p:cNvGraphicFramePr/>
+          <p:nvPr>
+            <p:extLst>
+              <p:ext uri="{D42A27DB-BD31-4B8C-83A1-F6EECF244321}">
+                <p14:modId xmlns:p14="http://schemas.microsoft.com/office/powerpoint/2010/main" val="4009053814"/>
+              </p:ext>
+            </p:extLst>
+          </p:nvPr>
+        </p:nvGraphicFramePr>
+        <p:xfrm>
+          <a:off x="1209464" y="4778817"/>
+          <a:ext cx="9072876" cy="830997"/>
+        </p:xfrm>
+        <a:graphic>
+          <a:graphicData uri="http://schemas.openxmlformats.org/drawingml/2006/diagram">
+            <dgm:relIds xmlns:dgm="http://schemas.openxmlformats.org/drawingml/2006/diagram" xmlns:r="http://schemas.openxmlformats.org/officeDocument/2006/relationships" r:dm="rId2" r:lo="rId3" r:qs="rId4" r:cs="rId5"/>
+          </a:graphicData>
+        </a:graphic>
+      </p:graphicFrame>
+      <p:sp>
+        <p:nvSpPr>
+          <p:cNvPr id="11" name="テキスト ボックス 10">
+            <a:extLst>
+              <a:ext uri="{FF2B5EF4-FFF2-40B4-BE49-F238E27FC236}">
+                <a16:creationId xmlns:a16="http://schemas.microsoft.com/office/drawing/2014/main" id="{896604E3-1F2B-A512-148E-44B70AEDA843}"/>
+              </a:ext>
+            </a:extLst>
+          </p:cNvPr>
+          <p:cNvSpPr txBox="1"/>
+          <p:nvPr/>
+        </p:nvSpPr>
+        <p:spPr>
+          <a:xfrm>
+            <a:off x="483005" y="1120676"/>
+            <a:ext cx="10375634" cy="2308324"/>
+          </a:xfrm>
+          <a:prstGeom prst="rect">
+            <a:avLst/>
+          </a:prstGeom>
+          <a:noFill/>
+        </p:spPr>
+        <p:txBody>
+          <a:bodyPr wrap="square" rtlCol="0">
+            <a:spAutoFit/>
+          </a:bodyPr>
+          <a:lstStyle/>
+          <a:p>
+            <a:pPr marL="457200" indent="-457200" algn="l">
+              <a:buFont typeface="+mj-lt"/>
+              <a:buAutoNum type="arabicPeriod"/>
+            </a:pPr>
+            <a:r>
+              <a:rPr kumimoji="1" lang="ja-JP" altLang="en-US" sz="2400" dirty="0">
+                <a:latin typeface="メイリオ" panose="020B0604030504040204" pitchFamily="50" charset="-128"/>
+                <a:ea typeface="メイリオ" panose="020B0604030504040204" pitchFamily="50" charset="-128"/>
+              </a:rPr>
+              <a:t>実は、学習の良し悪しは特徴抽出が決定的なこともある</a:t>
+            </a:r>
+            <a:endParaRPr kumimoji="1" lang="en-US" altLang="ja-JP" sz="2400" dirty="0">
+              <a:latin typeface="メイリオ" panose="020B0604030504040204" pitchFamily="50" charset="-128"/>
+              <a:ea typeface="メイリオ" panose="020B0604030504040204" pitchFamily="50" charset="-128"/>
+            </a:endParaRPr>
+          </a:p>
+          <a:p>
+            <a:pPr marL="457200" indent="-457200" algn="l">
+              <a:buFont typeface="+mj-lt"/>
+              <a:buAutoNum type="arabicPeriod"/>
+            </a:pPr>
+            <a:r>
+              <a:rPr kumimoji="1" lang="ja-JP" altLang="en-US" sz="2400" dirty="0">
+                <a:latin typeface="メイリオ" panose="020B0604030504040204" pitchFamily="50" charset="-128"/>
+                <a:ea typeface="メイリオ" panose="020B0604030504040204" pitchFamily="50" charset="-128"/>
+              </a:rPr>
+              <a:t>ヘタレな学習器でも特徴をうまく抽出すると相当な精度が確保できる</a:t>
+            </a:r>
+            <a:endParaRPr kumimoji="1" lang="en-US" altLang="ja-JP" sz="2400" dirty="0">
+              <a:latin typeface="メイリオ" panose="020B0604030504040204" pitchFamily="50" charset="-128"/>
+              <a:ea typeface="メイリオ" panose="020B0604030504040204" pitchFamily="50" charset="-128"/>
+            </a:endParaRPr>
+          </a:p>
+          <a:p>
+            <a:pPr marL="457200" indent="-457200" algn="l">
+              <a:buFont typeface="+mj-lt"/>
+              <a:buAutoNum type="arabicPeriod"/>
+            </a:pPr>
+            <a:r>
+              <a:rPr kumimoji="1" lang="ja-JP" altLang="en-US" sz="2400" dirty="0">
+                <a:latin typeface="メイリオ" panose="020B0604030504040204" pitchFamily="50" charset="-128"/>
+                <a:ea typeface="メイリオ" panose="020B0604030504040204" pitchFamily="50" charset="-128"/>
+              </a:rPr>
+              <a:t>識別精度を向上させるための様々な特徴抽出方法を特徴量エンジニアリングと呼ぶ</a:t>
+            </a:r>
+            <a:endParaRPr kumimoji="1" lang="en-US" altLang="ja-JP" sz="2400" dirty="0">
+              <a:latin typeface="メイリオ" panose="020B0604030504040204" pitchFamily="50" charset="-128"/>
+              <a:ea typeface="メイリオ" panose="020B0604030504040204" pitchFamily="50" charset="-128"/>
+            </a:endParaRPr>
+          </a:p>
+          <a:p>
+            <a:pPr marL="457200" indent="-457200" algn="l">
+              <a:buFont typeface="+mj-lt"/>
+              <a:buAutoNum type="arabicPeriod"/>
+            </a:pPr>
+            <a:r>
+              <a:rPr kumimoji="1" lang="ja-JP" altLang="en-US" sz="2400" dirty="0">
+                <a:latin typeface="メイリオ" panose="020B0604030504040204" pitchFamily="50" charset="-128"/>
+                <a:ea typeface="メイリオ" panose="020B0604030504040204" pitchFamily="50" charset="-128"/>
+              </a:rPr>
+              <a:t>低頻度語彙・汎用語彙フィルタリング、</a:t>
+            </a:r>
+            <a:r>
+              <a:rPr kumimoji="1" lang="en-US" altLang="ja-JP" sz="2400" dirty="0">
+                <a:latin typeface="メイリオ" panose="020B0604030504040204" pitchFamily="50" charset="-128"/>
+                <a:ea typeface="メイリオ" panose="020B0604030504040204" pitchFamily="50" charset="-128"/>
+              </a:rPr>
+              <a:t>TF-IDF</a:t>
+            </a:r>
+            <a:r>
+              <a:rPr kumimoji="1" lang="ja-JP" altLang="en-US" sz="2400" dirty="0">
+                <a:latin typeface="メイリオ" panose="020B0604030504040204" pitchFamily="50" charset="-128"/>
+                <a:ea typeface="メイリオ" panose="020B0604030504040204" pitchFamily="50" charset="-128"/>
+              </a:rPr>
+              <a:t>は</a:t>
+            </a:r>
+            <a:r>
+              <a:rPr kumimoji="1" lang="en-US" altLang="ja-JP" sz="2400" dirty="0">
+                <a:latin typeface="メイリオ" panose="020B0604030504040204" pitchFamily="50" charset="-128"/>
+                <a:ea typeface="メイリオ" panose="020B0604030504040204" pitchFamily="50" charset="-128"/>
+              </a:rPr>
+              <a:t>NLP(Natural Language Processing)</a:t>
+            </a:r>
+            <a:r>
+              <a:rPr kumimoji="1" lang="ja-JP" altLang="en-US" sz="2400" dirty="0">
+                <a:latin typeface="メイリオ" panose="020B0604030504040204" pitchFamily="50" charset="-128"/>
+                <a:ea typeface="メイリオ" panose="020B0604030504040204" pitchFamily="50" charset="-128"/>
+              </a:rPr>
+              <a:t>に固有な特徴量エンジニアリング</a:t>
+            </a:r>
+          </a:p>
+        </p:txBody>
+      </p:sp>
+      <p:sp>
+        <p:nvSpPr>
+          <p:cNvPr id="12" name="テキスト ボックス 11">
+            <a:extLst>
+              <a:ext uri="{FF2B5EF4-FFF2-40B4-BE49-F238E27FC236}">
+                <a16:creationId xmlns:a16="http://schemas.microsoft.com/office/drawing/2014/main" id="{99070144-6E93-88CC-5BBC-2A94D5AC91A7}"/>
+              </a:ext>
+            </a:extLst>
+          </p:cNvPr>
+          <p:cNvSpPr txBox="1"/>
+          <p:nvPr/>
+        </p:nvSpPr>
+        <p:spPr>
+          <a:xfrm>
+            <a:off x="1092822" y="4045791"/>
+            <a:ext cx="2905336" cy="830997"/>
+          </a:xfrm>
+          <a:prstGeom prst="rect">
+            <a:avLst/>
+          </a:prstGeom>
+          <a:noFill/>
+        </p:spPr>
+        <p:txBody>
+          <a:bodyPr wrap="square" rtlCol="0">
+            <a:spAutoFit/>
+          </a:bodyPr>
+          <a:lstStyle/>
+          <a:p>
+            <a:pPr algn="l"/>
+            <a:r>
+              <a:rPr kumimoji="1" lang="en-US" altLang="ja-JP" sz="2400" dirty="0" err="1">
+                <a:latin typeface="メイリオ" panose="020B0604030504040204" pitchFamily="50" charset="-128"/>
+                <a:ea typeface="メイリオ" panose="020B0604030504040204" pitchFamily="50" charset="-128"/>
+              </a:rPr>
+              <a:t>BoW</a:t>
+            </a:r>
+            <a:r>
+              <a:rPr kumimoji="1" lang="ja-JP" altLang="en-US" sz="2400" dirty="0">
+                <a:latin typeface="メイリオ" panose="020B0604030504040204" pitchFamily="50" charset="-128"/>
+                <a:ea typeface="メイリオ" panose="020B0604030504040204" pitchFamily="50" charset="-128"/>
+              </a:rPr>
+              <a:t>作成＋特徴量エンジニアリング</a:t>
+            </a:r>
+          </a:p>
+        </p:txBody>
+      </p:sp>
+    </p:spTree>
+    <p:extLst>
+      <p:ext uri="{BB962C8B-B14F-4D97-AF65-F5344CB8AC3E}">
+        <p14:creationId xmlns:p14="http://schemas.microsoft.com/office/powerpoint/2010/main" val="2236480565"/>
       </p:ext>
     </p:extLst>
   </p:cSld>
@@ -22263,270 +21805,6 @@
       </p:grpSpPr>
       <p:sp>
         <p:nvSpPr>
-          <p:cNvPr id="5" name="テキスト ボックス 4">
-            <a:extLst>
-              <a:ext uri="{FF2B5EF4-FFF2-40B4-BE49-F238E27FC236}">
-                <a16:creationId xmlns:a16="http://schemas.microsoft.com/office/drawing/2014/main" id="{31C561DB-6846-2052-5D3A-CAE5CC2CCE75}"/>
-              </a:ext>
-            </a:extLst>
-          </p:cNvPr>
-          <p:cNvSpPr txBox="1"/>
-          <p:nvPr/>
-        </p:nvSpPr>
-        <p:spPr>
-          <a:xfrm>
-            <a:off x="483005" y="395173"/>
-            <a:ext cx="7160935" cy="584775"/>
-          </a:xfrm>
-          <a:prstGeom prst="rect">
-            <a:avLst/>
-          </a:prstGeom>
-          <a:noFill/>
-        </p:spPr>
-        <p:txBody>
-          <a:bodyPr wrap="none" rtlCol="0">
-            <a:spAutoFit/>
-          </a:bodyPr>
-          <a:lstStyle/>
-          <a:p>
-            <a:pPr algn="l"/>
-            <a:r>
-              <a:rPr kumimoji="1" lang="ja-JP" altLang="en-US" sz="3200" dirty="0">
-                <a:latin typeface="メイリオ" panose="020B0604030504040204" pitchFamily="50" charset="-128"/>
-                <a:ea typeface="メイリオ" panose="020B0604030504040204" pitchFamily="50" charset="-128"/>
-              </a:rPr>
-              <a:t>テキストマイニングの流れ（まとめ）</a:t>
-            </a:r>
-          </a:p>
-        </p:txBody>
-      </p:sp>
-      <p:graphicFrame>
-        <p:nvGraphicFramePr>
-          <p:cNvPr id="18" name="図表 17">
-            <a:extLst>
-              <a:ext uri="{FF2B5EF4-FFF2-40B4-BE49-F238E27FC236}">
-                <a16:creationId xmlns:a16="http://schemas.microsoft.com/office/drawing/2014/main" id="{5A6A8792-1AE3-BD6C-04E1-92671CFEF200}"/>
-              </a:ext>
-            </a:extLst>
-          </p:cNvPr>
-          <p:cNvGraphicFramePr/>
-          <p:nvPr>
-            <p:extLst>
-              <p:ext uri="{D42A27DB-BD31-4B8C-83A1-F6EECF244321}">
-                <p14:modId xmlns:p14="http://schemas.microsoft.com/office/powerpoint/2010/main" val="4009053814"/>
-              </p:ext>
-            </p:extLst>
-          </p:nvPr>
-        </p:nvGraphicFramePr>
-        <p:xfrm>
-          <a:off x="1209464" y="4778817"/>
-          <a:ext cx="9072876" cy="830997"/>
-        </p:xfrm>
-        <a:graphic>
-          <a:graphicData uri="http://schemas.openxmlformats.org/drawingml/2006/diagram">
-            <dgm:relIds xmlns:dgm="http://schemas.openxmlformats.org/drawingml/2006/diagram" xmlns:r="http://schemas.openxmlformats.org/officeDocument/2006/relationships" r:dm="rId2" r:lo="rId3" r:qs="rId4" r:cs="rId5"/>
-          </a:graphicData>
-        </a:graphic>
-      </p:graphicFrame>
-      <p:sp>
-        <p:nvSpPr>
-          <p:cNvPr id="11" name="テキスト ボックス 10">
-            <a:extLst>
-              <a:ext uri="{FF2B5EF4-FFF2-40B4-BE49-F238E27FC236}">
-                <a16:creationId xmlns:a16="http://schemas.microsoft.com/office/drawing/2014/main" id="{896604E3-1F2B-A512-148E-44B70AEDA843}"/>
-              </a:ext>
-            </a:extLst>
-          </p:cNvPr>
-          <p:cNvSpPr txBox="1"/>
-          <p:nvPr/>
-        </p:nvSpPr>
-        <p:spPr>
-          <a:xfrm>
-            <a:off x="483005" y="1120676"/>
-            <a:ext cx="10375634" cy="2308324"/>
-          </a:xfrm>
-          <a:prstGeom prst="rect">
-            <a:avLst/>
-          </a:prstGeom>
-          <a:noFill/>
-        </p:spPr>
-        <p:txBody>
-          <a:bodyPr wrap="square" rtlCol="0">
-            <a:spAutoFit/>
-          </a:bodyPr>
-          <a:lstStyle/>
-          <a:p>
-            <a:pPr marL="457200" indent="-457200" algn="l">
-              <a:buFont typeface="+mj-lt"/>
-              <a:buAutoNum type="arabicPeriod"/>
-            </a:pPr>
-            <a:r>
-              <a:rPr kumimoji="1" lang="ja-JP" altLang="en-US" sz="2400" dirty="0">
-                <a:latin typeface="メイリオ" panose="020B0604030504040204" pitchFamily="50" charset="-128"/>
-                <a:ea typeface="メイリオ" panose="020B0604030504040204" pitchFamily="50" charset="-128"/>
-              </a:rPr>
-              <a:t>実は、学習の良し悪しは特徴抽出が決定的なこともある</a:t>
-            </a:r>
-            <a:endParaRPr kumimoji="1" lang="en-US" altLang="ja-JP" sz="2400" dirty="0">
-              <a:latin typeface="メイリオ" panose="020B0604030504040204" pitchFamily="50" charset="-128"/>
-              <a:ea typeface="メイリオ" panose="020B0604030504040204" pitchFamily="50" charset="-128"/>
-            </a:endParaRPr>
-          </a:p>
-          <a:p>
-            <a:pPr marL="457200" indent="-457200" algn="l">
-              <a:buFont typeface="+mj-lt"/>
-              <a:buAutoNum type="arabicPeriod"/>
-            </a:pPr>
-            <a:r>
-              <a:rPr kumimoji="1" lang="ja-JP" altLang="en-US" sz="2400" dirty="0">
-                <a:latin typeface="メイリオ" panose="020B0604030504040204" pitchFamily="50" charset="-128"/>
-                <a:ea typeface="メイリオ" panose="020B0604030504040204" pitchFamily="50" charset="-128"/>
-              </a:rPr>
-              <a:t>ヘタレな学習器でも特徴をうまく抽出すると相当な精度が確保できる</a:t>
-            </a:r>
-            <a:endParaRPr kumimoji="1" lang="en-US" altLang="ja-JP" sz="2400" dirty="0">
-              <a:latin typeface="メイリオ" panose="020B0604030504040204" pitchFamily="50" charset="-128"/>
-              <a:ea typeface="メイリオ" panose="020B0604030504040204" pitchFamily="50" charset="-128"/>
-            </a:endParaRPr>
-          </a:p>
-          <a:p>
-            <a:pPr marL="457200" indent="-457200" algn="l">
-              <a:buFont typeface="+mj-lt"/>
-              <a:buAutoNum type="arabicPeriod"/>
-            </a:pPr>
-            <a:r>
-              <a:rPr kumimoji="1" lang="ja-JP" altLang="en-US" sz="2400" dirty="0">
-                <a:latin typeface="メイリオ" panose="020B0604030504040204" pitchFamily="50" charset="-128"/>
-                <a:ea typeface="メイリオ" panose="020B0604030504040204" pitchFamily="50" charset="-128"/>
-              </a:rPr>
-              <a:t>識別精度を向上させるための様々な特徴抽出方法を特徴量エンジニアリングと呼ぶ</a:t>
-            </a:r>
-            <a:endParaRPr kumimoji="1" lang="en-US" altLang="ja-JP" sz="2400" dirty="0">
-              <a:latin typeface="メイリオ" panose="020B0604030504040204" pitchFamily="50" charset="-128"/>
-              <a:ea typeface="メイリオ" panose="020B0604030504040204" pitchFamily="50" charset="-128"/>
-            </a:endParaRPr>
-          </a:p>
-          <a:p>
-            <a:pPr marL="457200" indent="-457200" algn="l">
-              <a:buFont typeface="+mj-lt"/>
-              <a:buAutoNum type="arabicPeriod"/>
-            </a:pPr>
-            <a:r>
-              <a:rPr kumimoji="1" lang="ja-JP" altLang="en-US" sz="2400" dirty="0">
-                <a:latin typeface="メイリオ" panose="020B0604030504040204" pitchFamily="50" charset="-128"/>
-                <a:ea typeface="メイリオ" panose="020B0604030504040204" pitchFamily="50" charset="-128"/>
-              </a:rPr>
-              <a:t>低頻度語彙・汎用語彙フィルタリング、</a:t>
-            </a:r>
-            <a:r>
-              <a:rPr kumimoji="1" lang="en-US" altLang="ja-JP" sz="2400" dirty="0">
-                <a:latin typeface="メイリオ" panose="020B0604030504040204" pitchFamily="50" charset="-128"/>
-                <a:ea typeface="メイリオ" panose="020B0604030504040204" pitchFamily="50" charset="-128"/>
-              </a:rPr>
-              <a:t>TF-IDF</a:t>
-            </a:r>
-            <a:r>
-              <a:rPr kumimoji="1" lang="ja-JP" altLang="en-US" sz="2400" dirty="0">
-                <a:latin typeface="メイリオ" panose="020B0604030504040204" pitchFamily="50" charset="-128"/>
-                <a:ea typeface="メイリオ" panose="020B0604030504040204" pitchFamily="50" charset="-128"/>
-              </a:rPr>
-              <a:t>は</a:t>
-            </a:r>
-            <a:r>
-              <a:rPr kumimoji="1" lang="en-US" altLang="ja-JP" sz="2400" dirty="0">
-                <a:latin typeface="メイリオ" panose="020B0604030504040204" pitchFamily="50" charset="-128"/>
-                <a:ea typeface="メイリオ" panose="020B0604030504040204" pitchFamily="50" charset="-128"/>
-              </a:rPr>
-              <a:t>NLP(Natural Language Processing)</a:t>
-            </a:r>
-            <a:r>
-              <a:rPr kumimoji="1" lang="ja-JP" altLang="en-US" sz="2400" dirty="0">
-                <a:latin typeface="メイリオ" panose="020B0604030504040204" pitchFamily="50" charset="-128"/>
-                <a:ea typeface="メイリオ" panose="020B0604030504040204" pitchFamily="50" charset="-128"/>
-              </a:rPr>
-              <a:t>に固有な特徴量エンジニアリング</a:t>
-            </a:r>
-          </a:p>
-        </p:txBody>
-      </p:sp>
-      <p:sp>
-        <p:nvSpPr>
-          <p:cNvPr id="12" name="テキスト ボックス 11">
-            <a:extLst>
-              <a:ext uri="{FF2B5EF4-FFF2-40B4-BE49-F238E27FC236}">
-                <a16:creationId xmlns:a16="http://schemas.microsoft.com/office/drawing/2014/main" id="{99070144-6E93-88CC-5BBC-2A94D5AC91A7}"/>
-              </a:ext>
-            </a:extLst>
-          </p:cNvPr>
-          <p:cNvSpPr txBox="1"/>
-          <p:nvPr/>
-        </p:nvSpPr>
-        <p:spPr>
-          <a:xfrm>
-            <a:off x="1092822" y="4045791"/>
-            <a:ext cx="2905336" cy="830997"/>
-          </a:xfrm>
-          <a:prstGeom prst="rect">
-            <a:avLst/>
-          </a:prstGeom>
-          <a:noFill/>
-        </p:spPr>
-        <p:txBody>
-          <a:bodyPr wrap="square" rtlCol="0">
-            <a:spAutoFit/>
-          </a:bodyPr>
-          <a:lstStyle/>
-          <a:p>
-            <a:pPr algn="l"/>
-            <a:r>
-              <a:rPr kumimoji="1" lang="en-US" altLang="ja-JP" sz="2400" dirty="0" err="1">
-                <a:latin typeface="メイリオ" panose="020B0604030504040204" pitchFamily="50" charset="-128"/>
-                <a:ea typeface="メイリオ" panose="020B0604030504040204" pitchFamily="50" charset="-128"/>
-              </a:rPr>
-              <a:t>BoW</a:t>
-            </a:r>
-            <a:r>
-              <a:rPr kumimoji="1" lang="ja-JP" altLang="en-US" sz="2400" dirty="0">
-                <a:latin typeface="メイリオ" panose="020B0604030504040204" pitchFamily="50" charset="-128"/>
-                <a:ea typeface="メイリオ" panose="020B0604030504040204" pitchFamily="50" charset="-128"/>
-              </a:rPr>
-              <a:t>作成＋特徴量エンジニアリング</a:t>
-            </a:r>
-          </a:p>
-        </p:txBody>
-      </p:sp>
-    </p:spTree>
-    <p:extLst>
-      <p:ext uri="{BB962C8B-B14F-4D97-AF65-F5344CB8AC3E}">
-        <p14:creationId xmlns:p14="http://schemas.microsoft.com/office/powerpoint/2010/main" val="2236480565"/>
-      </p:ext>
-    </p:extLst>
-  </p:cSld>
-  <p:clrMapOvr>
-    <a:masterClrMapping/>
-  </p:clrMapOvr>
-</p:sld>
-</file>
-
-<file path=ppt/slides/slide21.xml><?xml version="1.0" encoding="utf-8"?>
-<p:sld xmlns:a="http://schemas.openxmlformats.org/drawingml/2006/main" xmlns:r="http://schemas.openxmlformats.org/officeDocument/2006/relationships" xmlns:p="http://schemas.openxmlformats.org/presentationml/2006/main">
-  <p:cSld>
-    <p:spTree>
-      <p:nvGrpSpPr>
-        <p:cNvPr id="1" name=""/>
-        <p:cNvGrpSpPr/>
-        <p:nvPr/>
-      </p:nvGrpSpPr>
-      <p:grpSpPr>
-        <a:xfrm>
-          <a:off x="0" y="0"/>
-          <a:ext cx="0" cy="0"/>
-          <a:chOff x="0" y="0"/>
-          <a:chExt cx="0" cy="0"/>
-        </a:xfrm>
-      </p:grpSpPr>
-      <p:sp>
-        <p:nvSpPr>
           <p:cNvPr id="2" name="テキスト ボックス 1">
             <a:extLst>
               <a:ext uri="{FF2B5EF4-FFF2-40B4-BE49-F238E27FC236}">
@@ -22577,7 +21855,7 @@
 </p:sld>
 </file>
 
-<file path=ppt/slides/slide22.xml><?xml version="1.0" encoding="utf-8"?>
+<file path=ppt/slides/slide21.xml><?xml version="1.0" encoding="utf-8"?>
 <p:sld xmlns:a="http://schemas.openxmlformats.org/drawingml/2006/main" xmlns:r="http://schemas.openxmlformats.org/officeDocument/2006/relationships" xmlns:p="http://schemas.openxmlformats.org/presentationml/2006/main">
   <p:cSld>
     <p:spTree>
@@ -24303,6 +23581,728 @@
 </p:sld>
 </file>
 
+<file path=ppt/slides/slide22.xml><?xml version="1.0" encoding="utf-8"?>
+<p:sld xmlns:a="http://schemas.openxmlformats.org/drawingml/2006/main" xmlns:r="http://schemas.openxmlformats.org/officeDocument/2006/relationships" xmlns:p="http://schemas.openxmlformats.org/presentationml/2006/main">
+  <p:cSld>
+    <p:spTree>
+      <p:nvGrpSpPr>
+        <p:cNvPr id="1" name=""/>
+        <p:cNvGrpSpPr/>
+        <p:nvPr/>
+      </p:nvGrpSpPr>
+      <p:grpSpPr>
+        <a:xfrm>
+          <a:off x="0" y="0"/>
+          <a:ext cx="0" cy="0"/>
+          <a:chOff x="0" y="0"/>
+          <a:chExt cx="0" cy="0"/>
+        </a:xfrm>
+      </p:grpSpPr>
+      <p:pic>
+        <p:nvPicPr>
+          <p:cNvPr id="2" name="Picture 2" descr="スクリーンショット 2016-05-04 3.33.02.png">
+            <a:extLst>
+              <a:ext uri="{FF2B5EF4-FFF2-40B4-BE49-F238E27FC236}">
+                <a16:creationId xmlns:a16="http://schemas.microsoft.com/office/drawing/2014/main" id="{47BADEAE-9B6E-ED3E-4A19-F89F9A9775F7}"/>
+              </a:ext>
+            </a:extLst>
+          </p:cNvPr>
+          <p:cNvPicPr>
+            <a:picLocks noChangeAspect="1" noChangeArrowheads="1"/>
+          </p:cNvPicPr>
+          <p:nvPr/>
+        </p:nvPicPr>
+        <p:blipFill>
+          <a:blip r:embed="rId2">
+            <a:extLst>
+              <a:ext uri="{28A0092B-C50C-407E-A947-70E740481C1C}">
+                <a14:useLocalDpi xmlns:a14="http://schemas.microsoft.com/office/drawing/2010/main" val="0"/>
+              </a:ext>
+            </a:extLst>
+          </a:blip>
+          <a:srcRect/>
+          <a:stretch>
+            <a:fillRect/>
+          </a:stretch>
+        </p:blipFill>
+        <p:spPr bwMode="auto">
+          <a:xfrm>
+            <a:off x="1298877" y="1166790"/>
+            <a:ext cx="4497070" cy="3310657"/>
+          </a:xfrm>
+          <a:prstGeom prst="rect">
+            <a:avLst/>
+          </a:prstGeom>
+          <a:noFill/>
+          <a:extLst>
+            <a:ext uri="{909E8E84-426E-40DD-AFC4-6F175D3DCCD1}">
+              <a14:hiddenFill xmlns:a14="http://schemas.microsoft.com/office/drawing/2010/main">
+                <a:solidFill>
+                  <a:srgbClr val="FFFFFF"/>
+                </a:solidFill>
+              </a14:hiddenFill>
+            </a:ext>
+          </a:extLst>
+        </p:spPr>
+      </p:pic>
+      <p:sp>
+        <p:nvSpPr>
+          <p:cNvPr id="3" name="テキスト ボックス 2">
+            <a:extLst>
+              <a:ext uri="{FF2B5EF4-FFF2-40B4-BE49-F238E27FC236}">
+                <a16:creationId xmlns:a16="http://schemas.microsoft.com/office/drawing/2014/main" id="{E7A76A66-6B5C-7F5C-0FC7-3DDC67D79355}"/>
+              </a:ext>
+            </a:extLst>
+          </p:cNvPr>
+          <p:cNvSpPr txBox="1"/>
+          <p:nvPr/>
+        </p:nvSpPr>
+        <p:spPr>
+          <a:xfrm>
+            <a:off x="1974575" y="3364058"/>
+            <a:ext cx="492443" cy="461665"/>
+          </a:xfrm>
+          <a:prstGeom prst="rect">
+            <a:avLst/>
+          </a:prstGeom>
+          <a:noFill/>
+        </p:spPr>
+        <p:txBody>
+          <a:bodyPr wrap="none" rtlCol="0">
+            <a:spAutoFit/>
+          </a:bodyPr>
+          <a:lstStyle/>
+          <a:p>
+            <a:pPr algn="l"/>
+            <a:r>
+              <a:rPr kumimoji="1" lang="ja-JP" altLang="en-US" sz="2400" dirty="0">
+                <a:solidFill>
+                  <a:schemeClr val="accent4">
+                    <a:lumMod val="60000"/>
+                    <a:lumOff val="40000"/>
+                  </a:schemeClr>
+                </a:solidFill>
+                <a:latin typeface="メイリオ" panose="020B0604030504040204" pitchFamily="50" charset="-128"/>
+                <a:ea typeface="メイリオ" panose="020B0604030504040204" pitchFamily="50" charset="-128"/>
+              </a:rPr>
+              <a:t>●</a:t>
+            </a:r>
+          </a:p>
+        </p:txBody>
+      </p:sp>
+      <p:sp>
+        <p:nvSpPr>
+          <p:cNvPr id="4" name="テキスト ボックス 3">
+            <a:extLst>
+              <a:ext uri="{FF2B5EF4-FFF2-40B4-BE49-F238E27FC236}">
+                <a16:creationId xmlns:a16="http://schemas.microsoft.com/office/drawing/2014/main" id="{F0EEF0E7-02DA-1EDA-BA1D-7CD05D79E283}"/>
+              </a:ext>
+            </a:extLst>
+          </p:cNvPr>
+          <p:cNvSpPr txBox="1"/>
+          <p:nvPr/>
+        </p:nvSpPr>
+        <p:spPr>
+          <a:xfrm>
+            <a:off x="2544419" y="1205617"/>
+            <a:ext cx="492443" cy="461665"/>
+          </a:xfrm>
+          <a:prstGeom prst="rect">
+            <a:avLst/>
+          </a:prstGeom>
+          <a:noFill/>
+        </p:spPr>
+        <p:txBody>
+          <a:bodyPr wrap="none" rtlCol="0">
+            <a:spAutoFit/>
+          </a:bodyPr>
+          <a:lstStyle/>
+          <a:p>
+            <a:pPr algn="l"/>
+            <a:r>
+              <a:rPr kumimoji="1" lang="ja-JP" altLang="en-US" sz="2400" dirty="0">
+                <a:solidFill>
+                  <a:schemeClr val="accent4">
+                    <a:lumMod val="60000"/>
+                    <a:lumOff val="40000"/>
+                  </a:schemeClr>
+                </a:solidFill>
+                <a:latin typeface="メイリオ" panose="020B0604030504040204" pitchFamily="50" charset="-128"/>
+                <a:ea typeface="メイリオ" panose="020B0604030504040204" pitchFamily="50" charset="-128"/>
+              </a:rPr>
+              <a:t>●</a:t>
+            </a:r>
+          </a:p>
+        </p:txBody>
+      </p:sp>
+      <p:sp>
+        <p:nvSpPr>
+          <p:cNvPr id="5" name="テキスト ボックス 4">
+            <a:extLst>
+              <a:ext uri="{FF2B5EF4-FFF2-40B4-BE49-F238E27FC236}">
+                <a16:creationId xmlns:a16="http://schemas.microsoft.com/office/drawing/2014/main" id="{31C561DB-6846-2052-5D3A-CAE5CC2CCE75}"/>
+              </a:ext>
+            </a:extLst>
+          </p:cNvPr>
+          <p:cNvSpPr txBox="1"/>
+          <p:nvPr/>
+        </p:nvSpPr>
+        <p:spPr>
+          <a:xfrm>
+            <a:off x="483005" y="395173"/>
+            <a:ext cx="4347665" cy="584775"/>
+          </a:xfrm>
+          <a:prstGeom prst="rect">
+            <a:avLst/>
+          </a:prstGeom>
+          <a:noFill/>
+        </p:spPr>
+        <p:txBody>
+          <a:bodyPr wrap="none" rtlCol="0">
+            <a:spAutoFit/>
+          </a:bodyPr>
+          <a:lstStyle/>
+          <a:p>
+            <a:pPr algn="l"/>
+            <a:r>
+              <a:rPr kumimoji="1" lang="en-US" altLang="ja-JP" sz="3200" dirty="0">
+                <a:latin typeface="メイリオ" panose="020B0604030504040204" pitchFamily="50" charset="-128"/>
+                <a:ea typeface="メイリオ" panose="020B0604030504040204" pitchFamily="50" charset="-128"/>
+              </a:rPr>
+              <a:t>KNN</a:t>
+            </a:r>
+            <a:r>
+              <a:rPr kumimoji="1" lang="ja-JP" altLang="en-US" sz="3200" dirty="0">
+                <a:latin typeface="メイリオ" panose="020B0604030504040204" pitchFamily="50" charset="-128"/>
+                <a:ea typeface="メイリオ" panose="020B0604030504040204" pitchFamily="50" charset="-128"/>
+              </a:rPr>
+              <a:t>による学習・予測</a:t>
+            </a:r>
+          </a:p>
+        </p:txBody>
+      </p:sp>
+      <p:sp>
+        <p:nvSpPr>
+          <p:cNvPr id="6" name="楕円 5">
+            <a:extLst>
+              <a:ext uri="{FF2B5EF4-FFF2-40B4-BE49-F238E27FC236}">
+                <a16:creationId xmlns:a16="http://schemas.microsoft.com/office/drawing/2014/main" id="{DF6481F8-0492-0D0A-CC2B-5BB6C0323B57}"/>
+              </a:ext>
+            </a:extLst>
+          </p:cNvPr>
+          <p:cNvSpPr/>
+          <p:nvPr/>
+        </p:nvSpPr>
+        <p:spPr>
+          <a:xfrm>
+            <a:off x="3333751" y="2569923"/>
+            <a:ext cx="342900" cy="371475"/>
+          </a:xfrm>
+          <a:prstGeom prst="ellipse">
+            <a:avLst/>
+          </a:prstGeom>
+          <a:solidFill>
+            <a:schemeClr val="bg1"/>
+          </a:solidFill>
+          <a:ln>
+            <a:solidFill>
+              <a:schemeClr val="bg1"/>
+            </a:solidFill>
+          </a:ln>
+        </p:spPr>
+        <p:style>
+          <a:lnRef idx="2">
+            <a:schemeClr val="accent1">
+              <a:shade val="50000"/>
+            </a:schemeClr>
+          </a:lnRef>
+          <a:fillRef idx="1">
+            <a:schemeClr val="accent1"/>
+          </a:fillRef>
+          <a:effectRef idx="0">
+            <a:schemeClr val="accent1"/>
+          </a:effectRef>
+          <a:fontRef idx="minor">
+            <a:schemeClr val="lt1"/>
+          </a:fontRef>
+        </p:style>
+        <p:txBody>
+          <a:bodyPr rtlCol="0" anchor="ctr"/>
+          <a:lstStyle/>
+          <a:p>
+            <a:pPr algn="ctr"/>
+            <a:endParaRPr kumimoji="1" lang="ja-JP" altLang="en-US"/>
+          </a:p>
+        </p:txBody>
+      </p:sp>
+      <p:sp>
+        <p:nvSpPr>
+          <p:cNvPr id="7" name="テキスト ボックス 6">
+            <a:extLst>
+              <a:ext uri="{FF2B5EF4-FFF2-40B4-BE49-F238E27FC236}">
+                <a16:creationId xmlns:a16="http://schemas.microsoft.com/office/drawing/2014/main" id="{39621FFF-83B7-160B-2205-C033DB38BD26}"/>
+              </a:ext>
+            </a:extLst>
+          </p:cNvPr>
+          <p:cNvSpPr txBox="1"/>
+          <p:nvPr/>
+        </p:nvSpPr>
+        <p:spPr>
+          <a:xfrm>
+            <a:off x="1391051" y="4361368"/>
+            <a:ext cx="4943475" cy="830997"/>
+          </a:xfrm>
+          <a:prstGeom prst="rect">
+            <a:avLst/>
+          </a:prstGeom>
+          <a:noFill/>
+        </p:spPr>
+        <p:txBody>
+          <a:bodyPr wrap="square" rtlCol="0">
+            <a:spAutoFit/>
+          </a:bodyPr>
+          <a:lstStyle/>
+          <a:p>
+            <a:pPr algn="l"/>
+            <a:r>
+              <a:rPr kumimoji="1" lang="ja-JP" altLang="en-US" sz="2400" dirty="0">
+                <a:latin typeface="メイリオ" panose="020B0604030504040204" pitchFamily="50" charset="-128"/>
+                <a:ea typeface="メイリオ" panose="020B0604030504040204" pitchFamily="50" charset="-128"/>
+              </a:rPr>
+              <a:t>最近傍の点の数</a:t>
+            </a:r>
+            <a:r>
+              <a:rPr kumimoji="1" lang="en-US" altLang="ja-JP" sz="2400" dirty="0">
+                <a:latin typeface="メイリオ" panose="020B0604030504040204" pitchFamily="50" charset="-128"/>
+                <a:ea typeface="メイリオ" panose="020B0604030504040204" pitchFamily="50" charset="-128"/>
+              </a:rPr>
+              <a:t>(K)</a:t>
+            </a:r>
+            <a:r>
+              <a:rPr kumimoji="1" lang="ja-JP" altLang="en-US" sz="2400" dirty="0">
+                <a:latin typeface="メイリオ" panose="020B0604030504040204" pitchFamily="50" charset="-128"/>
+                <a:ea typeface="メイリオ" panose="020B0604030504040204" pitchFamily="50" charset="-128"/>
+              </a:rPr>
+              <a:t>を決める（点線の円がいわば決定境界</a:t>
+            </a:r>
+            <a:r>
+              <a:rPr kumimoji="1" lang="en-US" altLang="ja-JP" sz="2400" dirty="0">
+                <a:latin typeface="メイリオ" panose="020B0604030504040204" pitchFamily="50" charset="-128"/>
+                <a:ea typeface="メイリオ" panose="020B0604030504040204" pitchFamily="50" charset="-128"/>
+              </a:rPr>
+              <a:t>(</a:t>
+            </a:r>
+            <a:r>
+              <a:rPr kumimoji="1" lang="ja-JP" altLang="en-US" sz="2400" dirty="0">
+                <a:latin typeface="メイリオ" panose="020B0604030504040204" pitchFamily="50" charset="-128"/>
+                <a:ea typeface="メイリオ" panose="020B0604030504040204" pitchFamily="50" charset="-128"/>
+              </a:rPr>
+              <a:t>注</a:t>
+            </a:r>
+            <a:r>
+              <a:rPr kumimoji="1" lang="en-US" altLang="ja-JP" sz="2400" dirty="0">
+                <a:latin typeface="メイリオ" panose="020B0604030504040204" pitchFamily="50" charset="-128"/>
+                <a:ea typeface="メイリオ" panose="020B0604030504040204" pitchFamily="50" charset="-128"/>
+              </a:rPr>
+              <a:t>)</a:t>
+            </a:r>
+            <a:r>
+              <a:rPr kumimoji="1" lang="ja-JP" altLang="en-US" sz="2400" dirty="0">
+                <a:latin typeface="メイリオ" panose="020B0604030504040204" pitchFamily="50" charset="-128"/>
+                <a:ea typeface="メイリオ" panose="020B0604030504040204" pitchFamily="50" charset="-128"/>
+              </a:rPr>
+              <a:t>）</a:t>
+            </a:r>
+          </a:p>
+        </p:txBody>
+      </p:sp>
+      <p:pic>
+        <p:nvPicPr>
+          <p:cNvPr id="8" name="Picture 2" descr="スクリーンショット 2016-05-04 3.33.02.png">
+            <a:extLst>
+              <a:ext uri="{FF2B5EF4-FFF2-40B4-BE49-F238E27FC236}">
+                <a16:creationId xmlns:a16="http://schemas.microsoft.com/office/drawing/2014/main" id="{B66AEAD5-C25C-E045-155C-2AC26CF03D65}"/>
+              </a:ext>
+            </a:extLst>
+          </p:cNvPr>
+          <p:cNvPicPr>
+            <a:picLocks noChangeAspect="1" noChangeArrowheads="1"/>
+          </p:cNvPicPr>
+          <p:nvPr/>
+        </p:nvPicPr>
+        <p:blipFill>
+          <a:blip r:embed="rId2">
+            <a:extLst>
+              <a:ext uri="{28A0092B-C50C-407E-A947-70E740481C1C}">
+                <a14:useLocalDpi xmlns:a14="http://schemas.microsoft.com/office/drawing/2010/main" val="0"/>
+              </a:ext>
+            </a:extLst>
+          </a:blip>
+          <a:srcRect/>
+          <a:stretch>
+            <a:fillRect/>
+          </a:stretch>
+        </p:blipFill>
+        <p:spPr bwMode="auto">
+          <a:xfrm>
+            <a:off x="6275705" y="1205617"/>
+            <a:ext cx="4497070" cy="3310657"/>
+          </a:xfrm>
+          <a:prstGeom prst="rect">
+            <a:avLst/>
+          </a:prstGeom>
+          <a:noFill/>
+          <a:extLst>
+            <a:ext uri="{909E8E84-426E-40DD-AFC4-6F175D3DCCD1}">
+              <a14:hiddenFill xmlns:a14="http://schemas.microsoft.com/office/drawing/2010/main">
+                <a:solidFill>
+                  <a:srgbClr val="FFFFFF"/>
+                </a:solidFill>
+              </a14:hiddenFill>
+            </a:ext>
+          </a:extLst>
+        </p:spPr>
+      </p:pic>
+      <p:sp>
+        <p:nvSpPr>
+          <p:cNvPr id="9" name="テキスト ボックス 8">
+            <a:extLst>
+              <a:ext uri="{FF2B5EF4-FFF2-40B4-BE49-F238E27FC236}">
+                <a16:creationId xmlns:a16="http://schemas.microsoft.com/office/drawing/2014/main" id="{237EBFC5-0100-3091-7E54-92A6034614B3}"/>
+              </a:ext>
+            </a:extLst>
+          </p:cNvPr>
+          <p:cNvSpPr txBox="1"/>
+          <p:nvPr/>
+        </p:nvSpPr>
+        <p:spPr>
+          <a:xfrm>
+            <a:off x="6899000" y="3418634"/>
+            <a:ext cx="492443" cy="461665"/>
+          </a:xfrm>
+          <a:prstGeom prst="rect">
+            <a:avLst/>
+          </a:prstGeom>
+          <a:noFill/>
+        </p:spPr>
+        <p:txBody>
+          <a:bodyPr wrap="none" rtlCol="0">
+            <a:spAutoFit/>
+          </a:bodyPr>
+          <a:lstStyle/>
+          <a:p>
+            <a:pPr algn="l"/>
+            <a:r>
+              <a:rPr kumimoji="1" lang="ja-JP" altLang="en-US" sz="2400" dirty="0">
+                <a:solidFill>
+                  <a:schemeClr val="accent4">
+                    <a:lumMod val="60000"/>
+                    <a:lumOff val="40000"/>
+                  </a:schemeClr>
+                </a:solidFill>
+                <a:latin typeface="メイリオ" panose="020B0604030504040204" pitchFamily="50" charset="-128"/>
+                <a:ea typeface="メイリオ" panose="020B0604030504040204" pitchFamily="50" charset="-128"/>
+              </a:rPr>
+              <a:t>●</a:t>
+            </a:r>
+          </a:p>
+        </p:txBody>
+      </p:sp>
+      <p:sp>
+        <p:nvSpPr>
+          <p:cNvPr id="10" name="テキスト ボックス 9">
+            <a:extLst>
+              <a:ext uri="{FF2B5EF4-FFF2-40B4-BE49-F238E27FC236}">
+                <a16:creationId xmlns:a16="http://schemas.microsoft.com/office/drawing/2014/main" id="{08B51688-D6A7-B96D-E9DC-6866C73F14DE}"/>
+              </a:ext>
+            </a:extLst>
+          </p:cNvPr>
+          <p:cNvSpPr txBox="1"/>
+          <p:nvPr/>
+        </p:nvSpPr>
+        <p:spPr>
+          <a:xfrm>
+            <a:off x="7468844" y="1260193"/>
+            <a:ext cx="492443" cy="461665"/>
+          </a:xfrm>
+          <a:prstGeom prst="rect">
+            <a:avLst/>
+          </a:prstGeom>
+          <a:noFill/>
+        </p:spPr>
+        <p:txBody>
+          <a:bodyPr wrap="none" rtlCol="0">
+            <a:spAutoFit/>
+          </a:bodyPr>
+          <a:lstStyle/>
+          <a:p>
+            <a:pPr algn="l"/>
+            <a:r>
+              <a:rPr kumimoji="1" lang="ja-JP" altLang="en-US" sz="2400" dirty="0">
+                <a:solidFill>
+                  <a:schemeClr val="accent4">
+                    <a:lumMod val="60000"/>
+                    <a:lumOff val="40000"/>
+                  </a:schemeClr>
+                </a:solidFill>
+                <a:latin typeface="メイリオ" panose="020B0604030504040204" pitchFamily="50" charset="-128"/>
+                <a:ea typeface="メイリオ" panose="020B0604030504040204" pitchFamily="50" charset="-128"/>
+              </a:rPr>
+              <a:t>●</a:t>
+            </a:r>
+          </a:p>
+        </p:txBody>
+      </p:sp>
+      <p:sp>
+        <p:nvSpPr>
+          <p:cNvPr id="13" name="テキスト ボックス 12">
+            <a:extLst>
+              <a:ext uri="{FF2B5EF4-FFF2-40B4-BE49-F238E27FC236}">
+                <a16:creationId xmlns:a16="http://schemas.microsoft.com/office/drawing/2014/main" id="{FE934083-C53D-A803-449B-1C16AC829C31}"/>
+              </a:ext>
+            </a:extLst>
+          </p:cNvPr>
+          <p:cNvSpPr txBox="1"/>
+          <p:nvPr/>
+        </p:nvSpPr>
+        <p:spPr>
+          <a:xfrm>
+            <a:off x="7235222" y="4246615"/>
+            <a:ext cx="2864887" cy="461665"/>
+          </a:xfrm>
+          <a:prstGeom prst="rect">
+            <a:avLst/>
+          </a:prstGeom>
+          <a:noFill/>
+        </p:spPr>
+        <p:txBody>
+          <a:bodyPr wrap="none" rtlCol="0">
+            <a:spAutoFit/>
+          </a:bodyPr>
+          <a:lstStyle/>
+          <a:p>
+            <a:pPr algn="l"/>
+            <a:r>
+              <a:rPr kumimoji="1" lang="en-US" altLang="ja-JP" sz="2400" dirty="0">
+                <a:latin typeface="メイリオ" panose="020B0604030504040204" pitchFamily="50" charset="-128"/>
+                <a:ea typeface="メイリオ" panose="020B0604030504040204" pitchFamily="50" charset="-128"/>
+              </a:rPr>
+              <a:t>K=3 : </a:t>
+            </a:r>
+            <a:r>
+              <a:rPr kumimoji="1" lang="ja-JP" altLang="en-US" sz="2400" dirty="0">
+                <a:solidFill>
+                  <a:srgbClr val="FF0000"/>
+                </a:solidFill>
+                <a:latin typeface="メイリオ" panose="020B0604030504040204" pitchFamily="50" charset="-128"/>
+                <a:ea typeface="メイリオ" panose="020B0604030504040204" pitchFamily="50" charset="-128"/>
+              </a:rPr>
+              <a:t>★</a:t>
+            </a:r>
+            <a:r>
+              <a:rPr kumimoji="1" lang="ja-JP" altLang="en-US" sz="2400" dirty="0">
+                <a:latin typeface="メイリオ" panose="020B0604030504040204" pitchFamily="50" charset="-128"/>
+                <a:ea typeface="メイリオ" panose="020B0604030504040204" pitchFamily="50" charset="-128"/>
+              </a:rPr>
+              <a:t>は</a:t>
+            </a:r>
+            <a:r>
+              <a:rPr kumimoji="1" lang="en-US" altLang="ja-JP" sz="2400" dirty="0">
+                <a:latin typeface="メイリオ" panose="020B0604030504040204" pitchFamily="50" charset="-128"/>
+                <a:ea typeface="メイリオ" panose="020B0604030504040204" pitchFamily="50" charset="-128"/>
+              </a:rPr>
+              <a:t>Class B</a:t>
+            </a:r>
+            <a:endParaRPr kumimoji="1" lang="ja-JP" altLang="en-US" sz="2400" dirty="0">
+              <a:latin typeface="メイリオ" panose="020B0604030504040204" pitchFamily="50" charset="-128"/>
+              <a:ea typeface="メイリオ" panose="020B0604030504040204" pitchFamily="50" charset="-128"/>
+            </a:endParaRPr>
+          </a:p>
+        </p:txBody>
+      </p:sp>
+      <p:sp>
+        <p:nvSpPr>
+          <p:cNvPr id="14" name="テキスト ボックス 13">
+            <a:extLst>
+              <a:ext uri="{FF2B5EF4-FFF2-40B4-BE49-F238E27FC236}">
+                <a16:creationId xmlns:a16="http://schemas.microsoft.com/office/drawing/2014/main" id="{24CB0954-FCFC-B8F7-0482-02A2C0433FC9}"/>
+              </a:ext>
+            </a:extLst>
+          </p:cNvPr>
+          <p:cNvSpPr txBox="1"/>
+          <p:nvPr/>
+        </p:nvSpPr>
+        <p:spPr>
+          <a:xfrm>
+            <a:off x="7233619" y="4664253"/>
+            <a:ext cx="2866490" cy="461665"/>
+          </a:xfrm>
+          <a:prstGeom prst="rect">
+            <a:avLst/>
+          </a:prstGeom>
+          <a:noFill/>
+        </p:spPr>
+        <p:txBody>
+          <a:bodyPr wrap="none" rtlCol="0">
+            <a:spAutoFit/>
+          </a:bodyPr>
+          <a:lstStyle/>
+          <a:p>
+            <a:pPr algn="l"/>
+            <a:r>
+              <a:rPr kumimoji="1" lang="en-US" altLang="ja-JP" sz="2400" dirty="0">
+                <a:latin typeface="メイリオ" panose="020B0604030504040204" pitchFamily="50" charset="-128"/>
+                <a:ea typeface="メイリオ" panose="020B0604030504040204" pitchFamily="50" charset="-128"/>
+              </a:rPr>
+              <a:t>K=6 : </a:t>
+            </a:r>
+            <a:r>
+              <a:rPr kumimoji="1" lang="ja-JP" altLang="en-US" sz="2400" dirty="0">
+                <a:solidFill>
+                  <a:srgbClr val="FF0000"/>
+                </a:solidFill>
+                <a:latin typeface="メイリオ" panose="020B0604030504040204" pitchFamily="50" charset="-128"/>
+                <a:ea typeface="メイリオ" panose="020B0604030504040204" pitchFamily="50" charset="-128"/>
+              </a:rPr>
+              <a:t>★</a:t>
+            </a:r>
+            <a:r>
+              <a:rPr kumimoji="1" lang="ja-JP" altLang="en-US" sz="2400" dirty="0">
+                <a:latin typeface="メイリオ" panose="020B0604030504040204" pitchFamily="50" charset="-128"/>
+                <a:ea typeface="メイリオ" panose="020B0604030504040204" pitchFamily="50" charset="-128"/>
+              </a:rPr>
+              <a:t>は</a:t>
+            </a:r>
+            <a:r>
+              <a:rPr kumimoji="1" lang="en-US" altLang="ja-JP" sz="2400" dirty="0">
+                <a:latin typeface="メイリオ" panose="020B0604030504040204" pitchFamily="50" charset="-128"/>
+                <a:ea typeface="メイリオ" panose="020B0604030504040204" pitchFamily="50" charset="-128"/>
+              </a:rPr>
+              <a:t>Class A</a:t>
+            </a:r>
+            <a:endParaRPr kumimoji="1" lang="ja-JP" altLang="en-US" sz="2400" dirty="0">
+              <a:latin typeface="メイリオ" panose="020B0604030504040204" pitchFamily="50" charset="-128"/>
+              <a:ea typeface="メイリオ" panose="020B0604030504040204" pitchFamily="50" charset="-128"/>
+            </a:endParaRPr>
+          </a:p>
+        </p:txBody>
+      </p:sp>
+      <p:graphicFrame>
+        <p:nvGraphicFramePr>
+          <p:cNvPr id="18" name="図表 17">
+            <a:extLst>
+              <a:ext uri="{FF2B5EF4-FFF2-40B4-BE49-F238E27FC236}">
+                <a16:creationId xmlns:a16="http://schemas.microsoft.com/office/drawing/2014/main" id="{5A6A8792-1AE3-BD6C-04E1-92671CFEF200}"/>
+              </a:ext>
+            </a:extLst>
+          </p:cNvPr>
+          <p:cNvGraphicFramePr/>
+          <p:nvPr/>
+        </p:nvGraphicFramePr>
+        <p:xfrm>
+          <a:off x="1974575" y="5154415"/>
+          <a:ext cx="9072876" cy="830997"/>
+        </p:xfrm>
+        <a:graphic>
+          <a:graphicData uri="http://schemas.openxmlformats.org/drawingml/2006/diagram">
+            <dgm:relIds xmlns:dgm="http://schemas.openxmlformats.org/drawingml/2006/diagram" xmlns:r="http://schemas.openxmlformats.org/officeDocument/2006/relationships" r:dm="rId3" r:lo="rId4" r:qs="rId5" r:cs="rId6"/>
+          </a:graphicData>
+        </a:graphic>
+      </p:graphicFrame>
+      <p:sp>
+        <p:nvSpPr>
+          <p:cNvPr id="19" name="テキスト ボックス 18">
+            <a:extLst>
+              <a:ext uri="{FF2B5EF4-FFF2-40B4-BE49-F238E27FC236}">
+                <a16:creationId xmlns:a16="http://schemas.microsoft.com/office/drawing/2014/main" id="{A023EEA0-2B33-9711-ED46-45F183E742C2}"/>
+              </a:ext>
+            </a:extLst>
+          </p:cNvPr>
+          <p:cNvSpPr txBox="1"/>
+          <p:nvPr/>
+        </p:nvSpPr>
+        <p:spPr>
+          <a:xfrm>
+            <a:off x="874380" y="6001162"/>
+            <a:ext cx="10965195" cy="923330"/>
+          </a:xfrm>
+          <a:prstGeom prst="rect">
+            <a:avLst/>
+          </a:prstGeom>
+          <a:noFill/>
+        </p:spPr>
+        <p:txBody>
+          <a:bodyPr wrap="square" rtlCol="0">
+            <a:spAutoFit/>
+          </a:bodyPr>
+          <a:lstStyle/>
+          <a:p>
+            <a:pPr algn="l"/>
+            <a:r>
+              <a:rPr kumimoji="1" lang="ja-JP" altLang="en-US" dirty="0">
+                <a:latin typeface="メイリオ" panose="020B0604030504040204" pitchFamily="50" charset="-128"/>
+                <a:ea typeface="メイリオ" panose="020B0604030504040204" pitchFamily="50" charset="-128"/>
+              </a:rPr>
+              <a:t>（注）★が与えられた都度円が変わる。つまり今まで述べてきた固定的な決定境界を引いているわけではないので学習してないとも言える（</a:t>
+            </a:r>
+            <a:r>
+              <a:rPr kumimoji="1" lang="en-US" altLang="ja-JP" dirty="0">
+                <a:latin typeface="メイリオ" panose="020B0604030504040204" pitchFamily="50" charset="-128"/>
+                <a:ea typeface="メイリオ" panose="020B0604030504040204" pitchFamily="50" charset="-128"/>
+              </a:rPr>
+              <a:t>p.179</a:t>
+            </a:r>
+            <a:r>
+              <a:rPr kumimoji="1" lang="ja-JP" altLang="en-US" dirty="0">
+                <a:latin typeface="メイリオ" panose="020B0604030504040204" pitchFamily="50" charset="-128"/>
+                <a:ea typeface="メイリオ" panose="020B0604030504040204" pitchFamily="50" charset="-128"/>
+              </a:rPr>
+              <a:t>中段：「</a:t>
+            </a:r>
+            <a:r>
+              <a:rPr kumimoji="1" lang="en-US" altLang="ja-JP" dirty="0">
+                <a:latin typeface="メイリオ" panose="020B0604030504040204" pitchFamily="50" charset="-128"/>
+                <a:ea typeface="メイリオ" panose="020B0604030504040204" pitchFamily="50" charset="-128"/>
+              </a:rPr>
+              <a:t>KNN</a:t>
+            </a:r>
+            <a:r>
+              <a:rPr kumimoji="1" lang="ja-JP" altLang="en-US" dirty="0">
+                <a:latin typeface="メイリオ" panose="020B0604030504040204" pitchFamily="50" charset="-128"/>
+                <a:ea typeface="メイリオ" panose="020B0604030504040204" pitchFamily="50" charset="-128"/>
+              </a:rPr>
+              <a:t>には学習というフェーズがない」）が、</a:t>
+            </a:r>
+            <a:r>
+              <a:rPr kumimoji="1" lang="en-US" altLang="ja-JP" dirty="0">
+                <a:latin typeface="メイリオ" panose="020B0604030504040204" pitchFamily="50" charset="-128"/>
+                <a:ea typeface="メイリオ" panose="020B0604030504040204" pitchFamily="50" charset="-128"/>
+              </a:rPr>
+              <a:t>K</a:t>
+            </a:r>
+            <a:r>
+              <a:rPr kumimoji="1" lang="ja-JP" altLang="en-US" dirty="0">
+                <a:latin typeface="メイリオ" panose="020B0604030504040204" pitchFamily="50" charset="-128"/>
+                <a:ea typeface="メイリオ" panose="020B0604030504040204" pitchFamily="50" charset="-128"/>
+              </a:rPr>
+              <a:t>を決めることが円の大きさを決めるので学習とみなします。</a:t>
+            </a:r>
+          </a:p>
+        </p:txBody>
+      </p:sp>
+    </p:spTree>
+    <p:extLst>
+      <p:ext uri="{BB962C8B-B14F-4D97-AF65-F5344CB8AC3E}">
+        <p14:creationId xmlns:p14="http://schemas.microsoft.com/office/powerpoint/2010/main" val="2043508112"/>
+      </p:ext>
+    </p:extLst>
+  </p:cSld>
+  <p:clrMapOvr>
+    <a:masterClrMapping/>
+  </p:clrMapOvr>
+</p:sld>
+</file>
+
 <file path=ppt/slides/slide3.xml><?xml version="1.0" encoding="utf-8"?>
 <p:sld xmlns:a="http://schemas.openxmlformats.org/drawingml/2006/main" xmlns:r="http://schemas.openxmlformats.org/officeDocument/2006/relationships" xmlns:p="http://schemas.openxmlformats.org/presentationml/2006/main">
   <p:cSld>
